--- a/output/wordlabs-vers-3day.pptx
+++ b/output/wordlabs-vers-3day.pptx
@@ -5622,7 +5622,7 @@
                 <a:ea typeface="Trebuchet MS" pitchFamily="34" charset="-122"/>
                 <a:cs typeface="Trebuchet MS" pitchFamily="34" charset="-120"/>
               </a:rPr>
-              <a:t>1</a:t>
+              <a:t>0</a:t>
             </a:r>
             <a:pPr algn="ctr" indent="0" marL="0">
               <a:buNone/>
@@ -6071,7 +6071,7 @@
                 <a:ea typeface="Calibri" pitchFamily="34" charset="-122"/>
                 <a:cs typeface="Calibri" pitchFamily="34" charset="-120"/>
               </a:rPr>
-              <a:t> sent us down a winding road, but we enjoyed the </a:t>
+              <a:t> took us on a </a:t>
             </a:r>
             <a:pPr algn="l" indent="0" marL="0">
               <a:buNone/>
@@ -6102,7 +6102,7 @@
                 <a:ea typeface="Calibri" pitchFamily="34" charset="-122"/>
                 <a:cs typeface="Calibri" pitchFamily="34" charset="-120"/>
               </a:rPr>
-              <a:t> journey home.</a:t>
+              <a:t> route through the countryside.</a:t>
             </a:r>
             <a:endParaRPr lang="en-US" sz="1800" dirty="0"/>
           </a:p>
@@ -7860,7 +7860,7 @@
                 <a:ea typeface="Calibri" pitchFamily="34" charset="-122"/>
                 <a:cs typeface="Calibri" pitchFamily="34" charset="-120"/>
               </a:rPr>
-              <a:t>apart, away</a:t>
+              <a:t>away, apart</a:t>
             </a:r>
             <a:endParaRPr lang="en-US" sz="850" dirty="0"/>
           </a:p>
@@ -8084,7 +8084,7 @@
                 <a:ea typeface="Calibri" pitchFamily="34" charset="-122"/>
                 <a:cs typeface="Calibri" pitchFamily="34" charset="-120"/>
               </a:rPr>
-              <a:t>act or result of</a:t>
+              <a:t>action or process</a:t>
             </a:r>
             <a:endParaRPr lang="en-US" sz="850" dirty="0"/>
           </a:p>
@@ -8957,7 +8957,7 @@
                 <a:ea typeface="Calibri" pitchFamily="34" charset="-122"/>
                 <a:cs typeface="Calibri" pitchFamily="34" charset="-120"/>
               </a:rPr>
-              <a:t>apart, away</a:t>
+              <a:t>away, apart</a:t>
             </a:r>
             <a:endParaRPr lang="en-US" sz="850" dirty="0"/>
           </a:p>
@@ -9181,7 +9181,7 @@
                 <a:ea typeface="Calibri" pitchFamily="34" charset="-122"/>
                 <a:cs typeface="Calibri" pitchFamily="34" charset="-120"/>
               </a:rPr>
-              <a:t>act or result of</a:t>
+              <a:t>action or process</a:t>
             </a:r>
             <a:endParaRPr lang="en-US" sz="850" dirty="0"/>
           </a:p>
@@ -10291,7 +10291,7 @@
                 <a:ea typeface="Calibri" pitchFamily="34" charset="-122"/>
                 <a:cs typeface="Calibri" pitchFamily="34" charset="-120"/>
               </a:rPr>
-              <a:t>apart, away</a:t>
+              <a:t>away, apart</a:t>
             </a:r>
             <a:endParaRPr lang="en-US" sz="850" dirty="0"/>
           </a:p>
@@ -10515,7 +10515,7 @@
                 <a:ea typeface="Calibri" pitchFamily="34" charset="-122"/>
                 <a:cs typeface="Calibri" pitchFamily="34" charset="-120"/>
               </a:rPr>
-              <a:t>act or result of</a:t>
+              <a:t>action or process</a:t>
             </a:r>
             <a:endParaRPr lang="en-US" sz="850" dirty="0"/>
           </a:p>
@@ -13138,7 +13138,7 @@
                 <a:ea typeface="Calibri" pitchFamily="34" charset="-122"/>
                 <a:cs typeface="Calibri" pitchFamily="34" charset="-120"/>
               </a:rPr>
-              <a:t>noun/verb marker</a:t>
+              <a:t>noun/verb forming</a:t>
             </a:r>
             <a:endParaRPr lang="en-US" sz="850" dirty="0"/>
           </a:p>
@@ -14235,7 +14235,7 @@
                 <a:ea typeface="Calibri" pitchFamily="34" charset="-122"/>
                 <a:cs typeface="Calibri" pitchFamily="34" charset="-120"/>
               </a:rPr>
-              <a:t>noun/verb marker</a:t>
+              <a:t>noun/verb forming</a:t>
             </a:r>
             <a:endParaRPr lang="en-US" sz="850" dirty="0"/>
           </a:p>
@@ -15729,7 +15729,7 @@
                 <a:ea typeface="Calibri" pitchFamily="34" charset="-122"/>
                 <a:cs typeface="Calibri" pitchFamily="34" charset="-120"/>
               </a:rPr>
-              <a:t>noun/verb marker</a:t>
+              <a:t>noun/verb forming</a:t>
             </a:r>
             <a:endParaRPr lang="en-US" sz="850" dirty="0"/>
           </a:p>
@@ -17363,7 +17363,7 @@
                 <a:ea typeface="Trebuchet MS" pitchFamily="34" charset="-122"/>
                 <a:cs typeface="Trebuchet MS" pitchFamily="34" charset="-120"/>
               </a:rPr>
-              <a:t>2</a:t>
+              <a:t>1</a:t>
             </a:r>
             <a:pPr algn="ctr" indent="0" marL="0">
               <a:buNone/>
@@ -17377,7 +17377,7 @@
                 <a:ea typeface="Trebuchet MS" pitchFamily="34" charset="-122"/>
                 <a:cs typeface="Trebuchet MS" pitchFamily="34" charset="-120"/>
               </a:rPr>
-              <a:t>  punctuation marks</a:t>
+              <a:t>  punctuation mark</a:t>
             </a:r>
             <a:endParaRPr lang="en-US" sz="2800" dirty="0"/>
           </a:p>
@@ -17781,7 +17781,7 @@
                 <a:ea typeface="Calibri" pitchFamily="34" charset="-122"/>
                 <a:cs typeface="Calibri" pitchFamily="34" charset="-120"/>
               </a:rPr>
-              <a:t>During our </a:t>
+              <a:t>After much </a:t>
             </a:r>
             <a:pPr algn="l" indent="0" marL="0">
               <a:buNone/>
@@ -17798,7 +17798,7 @@
                 <a:ea typeface="Calibri" pitchFamily="34" charset="-122"/>
                 <a:cs typeface="Calibri" pitchFamily="34" charset="-120"/>
               </a:rPr>
-              <a:t>conversation</a:t>
+              <a:t>controversy</a:t>
             </a:r>
             <a:pPr algn="l" indent="0" marL="0">
               <a:buNone/>
@@ -17812,7 +17812,7 @@
                 <a:ea typeface="Calibri" pitchFamily="34" charset="-122"/>
                 <a:cs typeface="Calibri" pitchFamily="34" charset="-120"/>
               </a:rPr>
-              <a:t>, we discovered that the </a:t>
+              <a:t>, the </a:t>
             </a:r>
             <a:pPr algn="l" indent="0" marL="0">
               <a:buNone/>
@@ -17829,7 +17829,7 @@
                 <a:ea typeface="Calibri" pitchFamily="34" charset="-122"/>
                 <a:cs typeface="Calibri" pitchFamily="34" charset="-120"/>
               </a:rPr>
-              <a:t>universe</a:t>
+              <a:t>conversion</a:t>
             </a:r>
             <a:pPr algn="l" indent="0" marL="0">
               <a:buNone/>
@@ -17843,7 +17843,7 @@
                 <a:ea typeface="Calibri" pitchFamily="34" charset="-122"/>
                 <a:cs typeface="Calibri" pitchFamily="34" charset="-120"/>
               </a:rPr>
-              <a:t> is </a:t>
+              <a:t> of the old building was considered a </a:t>
             </a:r>
             <a:pPr algn="l" indent="0" marL="0">
               <a:buNone/>
@@ -17874,7 +17874,7 @@
                 <a:ea typeface="Calibri" pitchFamily="34" charset="-122"/>
                 <a:cs typeface="Calibri" pitchFamily="34" charset="-120"/>
               </a:rPr>
-              <a:t>, full of constant change and turning.</a:t>
+              <a:t> solution.</a:t>
             </a:r>
             <a:endParaRPr lang="en-US" sz="1800" dirty="0"/>
           </a:p>
@@ -18029,7 +18029,7 @@
                 <a:ea typeface="Trebuchet MS" pitchFamily="34" charset="-122"/>
                 <a:cs typeface="Trebuchet MS" pitchFamily="34" charset="-120"/>
               </a:rPr>
-              <a:t>conversation</a:t>
+              <a:t>controversy</a:t>
             </a:r>
             <a:endParaRPr lang="en-US" sz="1400" dirty="0"/>
           </a:p>
@@ -18157,7 +18157,7 @@
                 <a:ea typeface="Trebuchet MS" pitchFamily="34" charset="-122"/>
                 <a:cs typeface="Trebuchet MS" pitchFamily="34" charset="-120"/>
               </a:rPr>
-              <a:t>universe</a:t>
+              <a:t>conversion</a:t>
             </a:r>
             <a:endParaRPr lang="en-US" sz="1400" dirty="0"/>
           </a:p>
@@ -18755,7 +18755,7 @@
                 <a:ea typeface="Trebuchet MS" pitchFamily="34" charset="-122"/>
                 <a:cs typeface="Trebuchet MS" pitchFamily="34" charset="-120"/>
               </a:rPr>
-              <a:t>conversation</a:t>
+              <a:t>controversy</a:t>
             </a:r>
             <a:endParaRPr lang="en-US" sz="2800" dirty="0"/>
           </a:p>
@@ -19582,7 +19582,7 @@
                 <a:ea typeface="Trebuchet MS" pitchFamily="34" charset="-122"/>
                 <a:cs typeface="Trebuchet MS" pitchFamily="34" charset="-120"/>
               </a:rPr>
-              <a:t>conversation</a:t>
+              <a:t>controversy</a:t>
             </a:r>
             <a:endParaRPr lang="en-US" sz="2800" dirty="0"/>
           </a:p>
@@ -19760,7 +19760,7 @@
                 <a:ea typeface="Calibri" pitchFamily="34" charset="-122"/>
                 <a:cs typeface="Calibri" pitchFamily="34" charset="-120"/>
               </a:rPr>
-              <a:t>together, with</a:t>
+              <a:t>against, together</a:t>
             </a:r>
             <a:endParaRPr lang="en-US" sz="850" dirty="0"/>
           </a:p>
@@ -19783,11 +19783,11 @@
             </a:avLst>
           </a:prstGeom>
           <a:solidFill>
-            <a:srgbClr val="CCFBF1"/>
+            <a:srgbClr val="FCE7F3"/>
           </a:solidFill>
           <a:ln w="19050">
             <a:solidFill>
-              <a:srgbClr val="0D9488"/>
+              <a:srgbClr val="DB2777"/>
             </a:solidFill>
             <a:prstDash val="solid"/>
           </a:ln>
@@ -19827,13 +19827,13 @@
             <a:r>
               <a:rPr lang="en-US" sz="1300" b="1" dirty="0">
                 <a:solidFill>
-                  <a:srgbClr val="0F766E"/>
+                  <a:srgbClr val="9D174D"/>
                 </a:solidFill>
                 <a:latin typeface="Trebuchet MS" pitchFamily="34" charset="0"/>
                 <a:ea typeface="Trebuchet MS" pitchFamily="34" charset="-122"/>
                 <a:cs typeface="Trebuchet MS" pitchFamily="34" charset="-120"/>
               </a:rPr>
-              <a:t>vers</a:t>
+              <a:t>tro</a:t>
             </a:r>
             <a:endParaRPr lang="en-US" sz="1300" dirty="0"/>
           </a:p>
@@ -19872,7 +19872,7 @@
                 <a:ea typeface="Calibri" pitchFamily="34" charset="-122"/>
                 <a:cs typeface="Calibri" pitchFamily="34" charset="-120"/>
               </a:rPr>
-              <a:t>to turn</a:t>
+              <a:t>connecting form</a:t>
             </a:r>
             <a:endParaRPr lang="en-US" sz="850" dirty="0"/>
           </a:p>
@@ -19895,11 +19895,11 @@
             </a:avLst>
           </a:prstGeom>
           <a:solidFill>
-            <a:srgbClr val="FCE7F3"/>
+            <a:srgbClr val="CCFBF1"/>
           </a:solidFill>
           <a:ln w="19050">
             <a:solidFill>
-              <a:srgbClr val="DB2777"/>
+              <a:srgbClr val="0D9488"/>
             </a:solidFill>
             <a:prstDash val="solid"/>
           </a:ln>
@@ -19939,13 +19939,13 @@
             <a:r>
               <a:rPr lang="en-US" sz="1300" b="1" dirty="0">
                 <a:solidFill>
-                  <a:srgbClr val="9D174D"/>
+                  <a:srgbClr val="0F766E"/>
                 </a:solidFill>
                 <a:latin typeface="Trebuchet MS" pitchFamily="34" charset="0"/>
                 <a:ea typeface="Trebuchet MS" pitchFamily="34" charset="-122"/>
                 <a:cs typeface="Trebuchet MS" pitchFamily="34" charset="-120"/>
               </a:rPr>
-              <a:t>a</a:t>
+              <a:t>vers</a:t>
             </a:r>
             <a:endParaRPr lang="en-US" sz="1300" dirty="0"/>
           </a:p>
@@ -19984,7 +19984,7 @@
                 <a:ea typeface="Calibri" pitchFamily="34" charset="-122"/>
                 <a:cs typeface="Calibri" pitchFamily="34" charset="-120"/>
               </a:rPr>
-              <a:t>connecting vowel</a:t>
+              <a:t>to turn</a:t>
             </a:r>
             <a:endParaRPr lang="en-US" sz="850" dirty="0"/>
           </a:p>
@@ -19992,46 +19992,7 @@
       </p:sp>
       <p:sp>
         <p:nvSpPr>
-          <p:cNvPr id="25" name="Text 23"/>
-          <p:cNvSpPr/>
-          <p:nvPr/>
-        </p:nvSpPr>
-        <p:spPr>
-          <a:xfrm>
-            <a:off x="5329123" y="2752344"/>
-            <a:ext cx="1581912" cy="182880"/>
-          </a:xfrm>
-          <a:prstGeom prst="rect">
-            <a:avLst/>
-          </a:prstGeom>
-          <a:noFill/>
-          <a:ln/>
-        </p:spPr>
-        <p:txBody>
-          <a:bodyPr wrap="square" lIns="0" tIns="0" rIns="0" bIns="0" rtlCol="0" anchor="t"/>
-          <a:lstStyle/>
-          <a:p>
-            <a:pPr algn="ctr" indent="0" marL="0">
-              <a:buNone/>
-            </a:pPr>
-            <a:r>
-              <a:rPr lang="en-US" sz="700" i="1" dirty="0">
-                <a:solidFill>
-                  <a:srgbClr val="94A3B8"/>
-                </a:solidFill>
-                <a:latin typeface="Calibri" pitchFamily="34" charset="0"/>
-                <a:ea typeface="Calibri" pitchFamily="34" charset="-122"/>
-                <a:cs typeface="Calibri" pitchFamily="34" charset="-120"/>
-              </a:rPr>
-              <a:t>links base to suffix</a:t>
-            </a:r>
-            <a:endParaRPr lang="en-US" sz="700" dirty="0"/>
-          </a:p>
-        </p:txBody>
-      </p:sp>
-      <p:sp>
-        <p:nvSpPr>
-          <p:cNvPr id="26" name="Shape 24"/>
+          <p:cNvPr id="25" name="Shape 23"/>
           <p:cNvSpPr/>
           <p:nvPr/>
         </p:nvSpPr>
@@ -20065,7 +20026,7 @@
       </p:sp>
       <p:sp>
         <p:nvSpPr>
-          <p:cNvPr id="27" name="Text 25"/>
+          <p:cNvPr id="26" name="Text 24"/>
           <p:cNvSpPr/>
           <p:nvPr/>
         </p:nvSpPr>
@@ -20096,7 +20057,7 @@
                 <a:ea typeface="Trebuchet MS" pitchFamily="34" charset="-122"/>
                 <a:cs typeface="Trebuchet MS" pitchFamily="34" charset="-120"/>
               </a:rPr>
-              <a:t>tion</a:t>
+              <a:t>y</a:t>
             </a:r>
             <a:endParaRPr lang="en-US" sz="1300" dirty="0"/>
           </a:p>
@@ -20104,7 +20065,7 @@
       </p:sp>
       <p:sp>
         <p:nvSpPr>
-          <p:cNvPr id="28" name="Text 26"/>
+          <p:cNvPr id="27" name="Text 25"/>
           <p:cNvSpPr/>
           <p:nvPr/>
         </p:nvSpPr>
@@ -20135,7 +20096,7 @@
                 <a:ea typeface="Calibri" pitchFamily="34" charset="-122"/>
                 <a:cs typeface="Calibri" pitchFamily="34" charset="-120"/>
               </a:rPr>
-              <a:t>act or result of</a:t>
+              <a:t>noun forming</a:t>
             </a:r>
             <a:endParaRPr lang="en-US" sz="850" dirty="0"/>
           </a:p>
@@ -20143,7 +20104,7 @@
       </p:sp>
       <p:sp>
         <p:nvSpPr>
-          <p:cNvPr id="29" name="Shape 27"/>
+          <p:cNvPr id="28" name="Shape 26"/>
           <p:cNvSpPr/>
           <p:nvPr/>
         </p:nvSpPr>
@@ -20170,7 +20131,7 @@
       </p:sp>
       <p:sp>
         <p:nvSpPr>
-          <p:cNvPr id="30" name="Text 28"/>
+          <p:cNvPr id="29" name="Text 27"/>
           <p:cNvSpPr/>
           <p:nvPr/>
         </p:nvSpPr>
@@ -20209,7 +20170,7 @@
       </p:sp>
       <p:sp>
         <p:nvSpPr>
-          <p:cNvPr id="31" name="Shape 29"/>
+          <p:cNvPr id="30" name="Shape 28"/>
           <p:cNvSpPr/>
           <p:nvPr/>
         </p:nvSpPr>
@@ -20236,7 +20197,7 @@
       </p:sp>
       <p:sp>
         <p:nvSpPr>
-          <p:cNvPr id="32" name="Text 30"/>
+          <p:cNvPr id="31" name="Text 29"/>
           <p:cNvSpPr/>
           <p:nvPr/>
         </p:nvSpPr>
@@ -20275,7 +20236,7 @@
       </p:sp>
       <p:sp>
         <p:nvSpPr>
-          <p:cNvPr id="33" name="Shape 31"/>
+          <p:cNvPr id="32" name="Shape 30"/>
           <p:cNvSpPr/>
           <p:nvPr/>
         </p:nvSpPr>
@@ -20302,7 +20263,7 @@
       </p:sp>
       <p:sp>
         <p:nvSpPr>
-          <p:cNvPr id="34" name="Text 32"/>
+          <p:cNvPr id="33" name="Text 31"/>
           <p:cNvSpPr/>
           <p:nvPr/>
         </p:nvSpPr>
@@ -20341,7 +20302,7 @@
       </p:sp>
       <p:sp>
         <p:nvSpPr>
-          <p:cNvPr id="35" name="Shape 33"/>
+          <p:cNvPr id="34" name="Shape 32"/>
           <p:cNvSpPr/>
           <p:nvPr/>
         </p:nvSpPr>
@@ -20368,7 +20329,7 @@
       </p:sp>
       <p:sp>
         <p:nvSpPr>
-          <p:cNvPr id="36" name="Text 34"/>
+          <p:cNvPr id="35" name="Text 33"/>
           <p:cNvSpPr/>
           <p:nvPr/>
         </p:nvSpPr>
@@ -20830,7 +20791,7 @@
                 <a:ea typeface="Trebuchet MS" pitchFamily="34" charset="-122"/>
                 <a:cs typeface="Trebuchet MS" pitchFamily="34" charset="-120"/>
               </a:rPr>
-              <a:t>conversation</a:t>
+              <a:t>controversy</a:t>
             </a:r>
             <a:endParaRPr lang="en-US" sz="2800" dirty="0"/>
           </a:p>
@@ -21008,7 +20969,7 @@
                 <a:ea typeface="Calibri" pitchFamily="34" charset="-122"/>
                 <a:cs typeface="Calibri" pitchFamily="34" charset="-120"/>
               </a:rPr>
-              <a:t>together, with</a:t>
+              <a:t>against, together</a:t>
             </a:r>
             <a:endParaRPr lang="en-US" sz="850" dirty="0"/>
           </a:p>
@@ -21031,11 +20992,11 @@
             </a:avLst>
           </a:prstGeom>
           <a:solidFill>
-            <a:srgbClr val="CCFBF1"/>
+            <a:srgbClr val="FCE7F3"/>
           </a:solidFill>
           <a:ln w="19050">
             <a:solidFill>
-              <a:srgbClr val="0D9488"/>
+              <a:srgbClr val="DB2777"/>
             </a:solidFill>
             <a:prstDash val="solid"/>
           </a:ln>
@@ -21075,13 +21036,13 @@
             <a:r>
               <a:rPr lang="en-US" sz="1300" b="1" dirty="0">
                 <a:solidFill>
-                  <a:srgbClr val="0F766E"/>
+                  <a:srgbClr val="9D174D"/>
                 </a:solidFill>
                 <a:latin typeface="Trebuchet MS" pitchFamily="34" charset="0"/>
                 <a:ea typeface="Trebuchet MS" pitchFamily="34" charset="-122"/>
                 <a:cs typeface="Trebuchet MS" pitchFamily="34" charset="-120"/>
               </a:rPr>
-              <a:t>vers</a:t>
+              <a:t>tro</a:t>
             </a:r>
             <a:endParaRPr lang="en-US" sz="1300" dirty="0"/>
           </a:p>
@@ -21120,7 +21081,7 @@
                 <a:ea typeface="Calibri" pitchFamily="34" charset="-122"/>
                 <a:cs typeface="Calibri" pitchFamily="34" charset="-120"/>
               </a:rPr>
-              <a:t>to turn</a:t>
+              <a:t>connecting form</a:t>
             </a:r>
             <a:endParaRPr lang="en-US" sz="850" dirty="0"/>
           </a:p>
@@ -21143,11 +21104,11 @@
             </a:avLst>
           </a:prstGeom>
           <a:solidFill>
-            <a:srgbClr val="FCE7F3"/>
+            <a:srgbClr val="CCFBF1"/>
           </a:solidFill>
           <a:ln w="19050">
             <a:solidFill>
-              <a:srgbClr val="DB2777"/>
+              <a:srgbClr val="0D9488"/>
             </a:solidFill>
             <a:prstDash val="solid"/>
           </a:ln>
@@ -21187,13 +21148,13 @@
             <a:r>
               <a:rPr lang="en-US" sz="1300" b="1" dirty="0">
                 <a:solidFill>
-                  <a:srgbClr val="9D174D"/>
+                  <a:srgbClr val="0F766E"/>
                 </a:solidFill>
                 <a:latin typeface="Trebuchet MS" pitchFamily="34" charset="0"/>
                 <a:ea typeface="Trebuchet MS" pitchFamily="34" charset="-122"/>
                 <a:cs typeface="Trebuchet MS" pitchFamily="34" charset="-120"/>
               </a:rPr>
-              <a:t>a</a:t>
+              <a:t>vers</a:t>
             </a:r>
             <a:endParaRPr lang="en-US" sz="1300" dirty="0"/>
           </a:p>
@@ -21232,7 +21193,7 @@
                 <a:ea typeface="Calibri" pitchFamily="34" charset="-122"/>
                 <a:cs typeface="Calibri" pitchFamily="34" charset="-120"/>
               </a:rPr>
-              <a:t>connecting vowel</a:t>
+              <a:t>to turn</a:t>
             </a:r>
             <a:endParaRPr lang="en-US" sz="850" dirty="0"/>
           </a:p>
@@ -21240,46 +21201,7 @@
       </p:sp>
       <p:sp>
         <p:nvSpPr>
-          <p:cNvPr id="25" name="Text 23"/>
-          <p:cNvSpPr/>
-          <p:nvPr/>
-        </p:nvSpPr>
-        <p:spPr>
-          <a:xfrm>
-            <a:off x="5329123" y="2752344"/>
-            <a:ext cx="1581912" cy="182880"/>
-          </a:xfrm>
-          <a:prstGeom prst="rect">
-            <a:avLst/>
-          </a:prstGeom>
-          <a:noFill/>
-          <a:ln/>
-        </p:spPr>
-        <p:txBody>
-          <a:bodyPr wrap="square" lIns="0" tIns="0" rIns="0" bIns="0" rtlCol="0" anchor="t"/>
-          <a:lstStyle/>
-          <a:p>
-            <a:pPr algn="ctr" indent="0" marL="0">
-              <a:buNone/>
-            </a:pPr>
-            <a:r>
-              <a:rPr lang="en-US" sz="700" i="1" dirty="0">
-                <a:solidFill>
-                  <a:srgbClr val="94A3B8"/>
-                </a:solidFill>
-                <a:latin typeface="Calibri" pitchFamily="34" charset="0"/>
-                <a:ea typeface="Calibri" pitchFamily="34" charset="-122"/>
-                <a:cs typeface="Calibri" pitchFamily="34" charset="-120"/>
-              </a:rPr>
-              <a:t>links base to suffix</a:t>
-            </a:r>
-            <a:endParaRPr lang="en-US" sz="700" dirty="0"/>
-          </a:p>
-        </p:txBody>
-      </p:sp>
-      <p:sp>
-        <p:nvSpPr>
-          <p:cNvPr id="26" name="Shape 24"/>
+          <p:cNvPr id="25" name="Shape 23"/>
           <p:cNvSpPr/>
           <p:nvPr/>
         </p:nvSpPr>
@@ -21313,7 +21235,7 @@
       </p:sp>
       <p:sp>
         <p:nvSpPr>
-          <p:cNvPr id="27" name="Text 25"/>
+          <p:cNvPr id="26" name="Text 24"/>
           <p:cNvSpPr/>
           <p:nvPr/>
         </p:nvSpPr>
@@ -21344,7 +21266,7 @@
                 <a:ea typeface="Trebuchet MS" pitchFamily="34" charset="-122"/>
                 <a:cs typeface="Trebuchet MS" pitchFamily="34" charset="-120"/>
               </a:rPr>
-              <a:t>tion</a:t>
+              <a:t>y</a:t>
             </a:r>
             <a:endParaRPr lang="en-US" sz="1300" dirty="0"/>
           </a:p>
@@ -21352,7 +21274,7 @@
       </p:sp>
       <p:sp>
         <p:nvSpPr>
-          <p:cNvPr id="28" name="Text 26"/>
+          <p:cNvPr id="27" name="Text 25"/>
           <p:cNvSpPr/>
           <p:nvPr/>
         </p:nvSpPr>
@@ -21383,7 +21305,7 @@
                 <a:ea typeface="Calibri" pitchFamily="34" charset="-122"/>
                 <a:cs typeface="Calibri" pitchFamily="34" charset="-120"/>
               </a:rPr>
-              <a:t>act or result of</a:t>
+              <a:t>noun forming</a:t>
             </a:r>
             <a:endParaRPr lang="en-US" sz="850" dirty="0"/>
           </a:p>
@@ -21391,7 +21313,7 @@
       </p:sp>
       <p:sp>
         <p:nvSpPr>
-          <p:cNvPr id="29" name="Shape 27"/>
+          <p:cNvPr id="28" name="Shape 26"/>
           <p:cNvSpPr/>
           <p:nvPr/>
         </p:nvSpPr>
@@ -21418,7 +21340,7 @@
       </p:sp>
       <p:sp>
         <p:nvSpPr>
-          <p:cNvPr id="30" name="Text 28"/>
+          <p:cNvPr id="29" name="Text 27"/>
           <p:cNvSpPr/>
           <p:nvPr/>
         </p:nvSpPr>
@@ -21457,7 +21379,7 @@
       </p:sp>
       <p:sp>
         <p:nvSpPr>
-          <p:cNvPr id="31" name="Shape 29"/>
+          <p:cNvPr id="30" name="Shape 28"/>
           <p:cNvSpPr/>
           <p:nvPr/>
         </p:nvSpPr>
@@ -21484,7 +21406,7 @@
       </p:sp>
       <p:sp>
         <p:nvSpPr>
-          <p:cNvPr id="32" name="Shape 30"/>
+          <p:cNvPr id="31" name="Shape 29"/>
           <p:cNvSpPr/>
           <p:nvPr/>
         </p:nvSpPr>
@@ -21511,7 +21433,7 @@
       </p:sp>
       <p:sp>
         <p:nvSpPr>
-          <p:cNvPr id="33" name="Text 31"/>
+          <p:cNvPr id="32" name="Text 30"/>
           <p:cNvSpPr/>
           <p:nvPr/>
         </p:nvSpPr>
@@ -21550,7 +21472,7 @@
       </p:sp>
       <p:sp>
         <p:nvSpPr>
-          <p:cNvPr id="34" name="Text 32"/>
+          <p:cNvPr id="33" name="Text 31"/>
           <p:cNvSpPr/>
           <p:nvPr/>
         </p:nvSpPr>
@@ -21589,7 +21511,7 @@
       </p:sp>
       <p:sp>
         <p:nvSpPr>
-          <p:cNvPr id="35" name="Shape 33"/>
+          <p:cNvPr id="34" name="Shape 32"/>
           <p:cNvSpPr/>
           <p:nvPr/>
         </p:nvSpPr>
@@ -21616,7 +21538,7 @@
       </p:sp>
       <p:sp>
         <p:nvSpPr>
-          <p:cNvPr id="36" name="Text 34"/>
+          <p:cNvPr id="35" name="Text 33"/>
           <p:cNvSpPr/>
           <p:nvPr/>
         </p:nvSpPr>
@@ -21647,7 +21569,7 @@
                 <a:ea typeface="Trebuchet MS" pitchFamily="34" charset="-122"/>
                 <a:cs typeface="Trebuchet MS" pitchFamily="34" charset="-120"/>
               </a:rPr>
-              <a:t>ver</a:t>
+              <a:t>tro</a:t>
             </a:r>
             <a:endParaRPr lang="en-US" sz="1400" dirty="0"/>
           </a:p>
@@ -21655,7 +21577,7 @@
       </p:sp>
       <p:sp>
         <p:nvSpPr>
-          <p:cNvPr id="37" name="Text 35"/>
+          <p:cNvPr id="36" name="Text 34"/>
           <p:cNvSpPr/>
           <p:nvPr/>
         </p:nvSpPr>
@@ -21694,7 +21616,7 @@
       </p:sp>
       <p:sp>
         <p:nvSpPr>
-          <p:cNvPr id="38" name="Shape 36"/>
+          <p:cNvPr id="37" name="Shape 35"/>
           <p:cNvSpPr/>
           <p:nvPr/>
         </p:nvSpPr>
@@ -21721,7 +21643,7 @@
       </p:sp>
       <p:sp>
         <p:nvSpPr>
-          <p:cNvPr id="39" name="Text 37"/>
+          <p:cNvPr id="38" name="Text 36"/>
           <p:cNvSpPr/>
           <p:nvPr/>
         </p:nvSpPr>
@@ -21752,7 +21674,7 @@
                 <a:ea typeface="Trebuchet MS" pitchFamily="34" charset="-122"/>
                 <a:cs typeface="Trebuchet MS" pitchFamily="34" charset="-120"/>
               </a:rPr>
-              <a:t>sa</a:t>
+              <a:t>ver</a:t>
             </a:r>
             <a:endParaRPr lang="en-US" sz="1400" dirty="0"/>
           </a:p>
@@ -21760,7 +21682,7 @@
       </p:sp>
       <p:sp>
         <p:nvSpPr>
-          <p:cNvPr id="40" name="Text 38"/>
+          <p:cNvPr id="39" name="Text 37"/>
           <p:cNvSpPr/>
           <p:nvPr/>
         </p:nvSpPr>
@@ -21799,7 +21721,7 @@
       </p:sp>
       <p:sp>
         <p:nvSpPr>
-          <p:cNvPr id="41" name="Shape 39"/>
+          <p:cNvPr id="40" name="Shape 38"/>
           <p:cNvSpPr/>
           <p:nvPr/>
         </p:nvSpPr>
@@ -21826,7 +21748,7 @@
       </p:sp>
       <p:sp>
         <p:nvSpPr>
-          <p:cNvPr id="42" name="Text 40"/>
+          <p:cNvPr id="41" name="Text 39"/>
           <p:cNvSpPr/>
           <p:nvPr/>
         </p:nvSpPr>
@@ -21857,7 +21779,7 @@
                 <a:ea typeface="Trebuchet MS" pitchFamily="34" charset="-122"/>
                 <a:cs typeface="Trebuchet MS" pitchFamily="34" charset="-120"/>
               </a:rPr>
-              <a:t>tion</a:t>
+              <a:t>sy</a:t>
             </a:r>
             <a:endParaRPr lang="en-US" sz="1400" dirty="0"/>
           </a:p>
@@ -21865,7 +21787,7 @@
       </p:sp>
       <p:sp>
         <p:nvSpPr>
-          <p:cNvPr id="43" name="Shape 41"/>
+          <p:cNvPr id="42" name="Shape 40"/>
           <p:cNvSpPr/>
           <p:nvPr/>
         </p:nvSpPr>
@@ -21892,7 +21814,7 @@
       </p:sp>
       <p:sp>
         <p:nvSpPr>
-          <p:cNvPr id="44" name="Text 42"/>
+          <p:cNvPr id="43" name="Text 41"/>
           <p:cNvSpPr/>
           <p:nvPr/>
         </p:nvSpPr>
@@ -21931,7 +21853,7 @@
       </p:sp>
       <p:sp>
         <p:nvSpPr>
-          <p:cNvPr id="45" name="Shape 43"/>
+          <p:cNvPr id="44" name="Shape 42"/>
           <p:cNvSpPr/>
           <p:nvPr/>
         </p:nvSpPr>
@@ -21958,7 +21880,7 @@
       </p:sp>
       <p:sp>
         <p:nvSpPr>
-          <p:cNvPr id="46" name="Text 44"/>
+          <p:cNvPr id="45" name="Text 43"/>
           <p:cNvSpPr/>
           <p:nvPr/>
         </p:nvSpPr>
@@ -22420,7 +22342,7 @@
                 <a:ea typeface="Trebuchet MS" pitchFamily="34" charset="-122"/>
                 <a:cs typeface="Trebuchet MS" pitchFamily="34" charset="-120"/>
               </a:rPr>
-              <a:t>conversation</a:t>
+              <a:t>controversy</a:t>
             </a:r>
             <a:endParaRPr lang="en-US" sz="2800" dirty="0"/>
           </a:p>
@@ -22598,7 +22520,7 @@
                 <a:ea typeface="Calibri" pitchFamily="34" charset="-122"/>
                 <a:cs typeface="Calibri" pitchFamily="34" charset="-120"/>
               </a:rPr>
-              <a:t>together, with</a:t>
+              <a:t>against, together</a:t>
             </a:r>
             <a:endParaRPr lang="en-US" sz="850" dirty="0"/>
           </a:p>
@@ -22621,11 +22543,11 @@
             </a:avLst>
           </a:prstGeom>
           <a:solidFill>
-            <a:srgbClr val="CCFBF1"/>
+            <a:srgbClr val="FCE7F3"/>
           </a:solidFill>
           <a:ln w="19050">
             <a:solidFill>
-              <a:srgbClr val="0D9488"/>
+              <a:srgbClr val="DB2777"/>
             </a:solidFill>
             <a:prstDash val="solid"/>
           </a:ln>
@@ -22665,13 +22587,13 @@
             <a:r>
               <a:rPr lang="en-US" sz="1300" b="1" dirty="0">
                 <a:solidFill>
-                  <a:srgbClr val="0F766E"/>
+                  <a:srgbClr val="9D174D"/>
                 </a:solidFill>
                 <a:latin typeface="Trebuchet MS" pitchFamily="34" charset="0"/>
                 <a:ea typeface="Trebuchet MS" pitchFamily="34" charset="-122"/>
                 <a:cs typeface="Trebuchet MS" pitchFamily="34" charset="-120"/>
               </a:rPr>
-              <a:t>vers</a:t>
+              <a:t>tro</a:t>
             </a:r>
             <a:endParaRPr lang="en-US" sz="1300" dirty="0"/>
           </a:p>
@@ -22710,7 +22632,7 @@
                 <a:ea typeface="Calibri" pitchFamily="34" charset="-122"/>
                 <a:cs typeface="Calibri" pitchFamily="34" charset="-120"/>
               </a:rPr>
-              <a:t>to turn</a:t>
+              <a:t>connecting form</a:t>
             </a:r>
             <a:endParaRPr lang="en-US" sz="850" dirty="0"/>
           </a:p>
@@ -22733,11 +22655,11 @@
             </a:avLst>
           </a:prstGeom>
           <a:solidFill>
-            <a:srgbClr val="FCE7F3"/>
+            <a:srgbClr val="CCFBF1"/>
           </a:solidFill>
           <a:ln w="19050">
             <a:solidFill>
-              <a:srgbClr val="DB2777"/>
+              <a:srgbClr val="0D9488"/>
             </a:solidFill>
             <a:prstDash val="solid"/>
           </a:ln>
@@ -22777,13 +22699,13 @@
             <a:r>
               <a:rPr lang="en-US" sz="1300" b="1" dirty="0">
                 <a:solidFill>
-                  <a:srgbClr val="9D174D"/>
+                  <a:srgbClr val="0F766E"/>
                 </a:solidFill>
                 <a:latin typeface="Trebuchet MS" pitchFamily="34" charset="0"/>
                 <a:ea typeface="Trebuchet MS" pitchFamily="34" charset="-122"/>
                 <a:cs typeface="Trebuchet MS" pitchFamily="34" charset="-120"/>
               </a:rPr>
-              <a:t>a</a:t>
+              <a:t>vers</a:t>
             </a:r>
             <a:endParaRPr lang="en-US" sz="1300" dirty="0"/>
           </a:p>
@@ -22822,7 +22744,7 @@
                 <a:ea typeface="Calibri" pitchFamily="34" charset="-122"/>
                 <a:cs typeface="Calibri" pitchFamily="34" charset="-120"/>
               </a:rPr>
-              <a:t>connecting vowel</a:t>
+              <a:t>to turn</a:t>
             </a:r>
             <a:endParaRPr lang="en-US" sz="850" dirty="0"/>
           </a:p>
@@ -22830,46 +22752,7 @@
       </p:sp>
       <p:sp>
         <p:nvSpPr>
-          <p:cNvPr id="25" name="Text 23"/>
-          <p:cNvSpPr/>
-          <p:nvPr/>
-        </p:nvSpPr>
-        <p:spPr>
-          <a:xfrm>
-            <a:off x="5329123" y="2752344"/>
-            <a:ext cx="1581912" cy="182880"/>
-          </a:xfrm>
-          <a:prstGeom prst="rect">
-            <a:avLst/>
-          </a:prstGeom>
-          <a:noFill/>
-          <a:ln/>
-        </p:spPr>
-        <p:txBody>
-          <a:bodyPr wrap="square" lIns="0" tIns="0" rIns="0" bIns="0" rtlCol="0" anchor="t"/>
-          <a:lstStyle/>
-          <a:p>
-            <a:pPr algn="ctr" indent="0" marL="0">
-              <a:buNone/>
-            </a:pPr>
-            <a:r>
-              <a:rPr lang="en-US" sz="700" i="1" dirty="0">
-                <a:solidFill>
-                  <a:srgbClr val="94A3B8"/>
-                </a:solidFill>
-                <a:latin typeface="Calibri" pitchFamily="34" charset="0"/>
-                <a:ea typeface="Calibri" pitchFamily="34" charset="-122"/>
-                <a:cs typeface="Calibri" pitchFamily="34" charset="-120"/>
-              </a:rPr>
-              <a:t>links base to suffix</a:t>
-            </a:r>
-            <a:endParaRPr lang="en-US" sz="700" dirty="0"/>
-          </a:p>
-        </p:txBody>
-      </p:sp>
-      <p:sp>
-        <p:nvSpPr>
-          <p:cNvPr id="26" name="Shape 24"/>
+          <p:cNvPr id="25" name="Shape 23"/>
           <p:cNvSpPr/>
           <p:nvPr/>
         </p:nvSpPr>
@@ -22903,7 +22786,7 @@
       </p:sp>
       <p:sp>
         <p:nvSpPr>
-          <p:cNvPr id="27" name="Text 25"/>
+          <p:cNvPr id="26" name="Text 24"/>
           <p:cNvSpPr/>
           <p:nvPr/>
         </p:nvSpPr>
@@ -22934,7 +22817,7 @@
                 <a:ea typeface="Trebuchet MS" pitchFamily="34" charset="-122"/>
                 <a:cs typeface="Trebuchet MS" pitchFamily="34" charset="-120"/>
               </a:rPr>
-              <a:t>tion</a:t>
+              <a:t>y</a:t>
             </a:r>
             <a:endParaRPr lang="en-US" sz="1300" dirty="0"/>
           </a:p>
@@ -22942,7 +22825,7 @@
       </p:sp>
       <p:sp>
         <p:nvSpPr>
-          <p:cNvPr id="28" name="Text 26"/>
+          <p:cNvPr id="27" name="Text 25"/>
           <p:cNvSpPr/>
           <p:nvPr/>
         </p:nvSpPr>
@@ -22973,7 +22856,7 @@
                 <a:ea typeface="Calibri" pitchFamily="34" charset="-122"/>
                 <a:cs typeface="Calibri" pitchFamily="34" charset="-120"/>
               </a:rPr>
-              <a:t>act or result of</a:t>
+              <a:t>noun forming</a:t>
             </a:r>
             <a:endParaRPr lang="en-US" sz="850" dirty="0"/>
           </a:p>
@@ -22981,7 +22864,7 @@
       </p:sp>
       <p:sp>
         <p:nvSpPr>
-          <p:cNvPr id="29" name="Shape 27"/>
+          <p:cNvPr id="28" name="Shape 26"/>
           <p:cNvSpPr/>
           <p:nvPr/>
         </p:nvSpPr>
@@ -23008,7 +22891,7 @@
       </p:sp>
       <p:sp>
         <p:nvSpPr>
-          <p:cNvPr id="30" name="Text 28"/>
+          <p:cNvPr id="29" name="Text 27"/>
           <p:cNvSpPr/>
           <p:nvPr/>
         </p:nvSpPr>
@@ -23047,7 +22930,7 @@
       </p:sp>
       <p:sp>
         <p:nvSpPr>
-          <p:cNvPr id="31" name="Shape 29"/>
+          <p:cNvPr id="30" name="Shape 28"/>
           <p:cNvSpPr/>
           <p:nvPr/>
         </p:nvSpPr>
@@ -23074,7 +22957,7 @@
       </p:sp>
       <p:sp>
         <p:nvSpPr>
-          <p:cNvPr id="32" name="Shape 30"/>
+          <p:cNvPr id="31" name="Shape 29"/>
           <p:cNvSpPr/>
           <p:nvPr/>
         </p:nvSpPr>
@@ -23101,7 +22984,7 @@
       </p:sp>
       <p:sp>
         <p:nvSpPr>
-          <p:cNvPr id="33" name="Text 31"/>
+          <p:cNvPr id="32" name="Text 30"/>
           <p:cNvSpPr/>
           <p:nvPr/>
         </p:nvSpPr>
@@ -23140,7 +23023,7 @@
       </p:sp>
       <p:sp>
         <p:nvSpPr>
-          <p:cNvPr id="34" name="Text 32"/>
+          <p:cNvPr id="33" name="Text 31"/>
           <p:cNvSpPr/>
           <p:nvPr/>
         </p:nvSpPr>
@@ -23179,7 +23062,7 @@
       </p:sp>
       <p:sp>
         <p:nvSpPr>
-          <p:cNvPr id="35" name="Shape 33"/>
+          <p:cNvPr id="34" name="Shape 32"/>
           <p:cNvSpPr/>
           <p:nvPr/>
         </p:nvSpPr>
@@ -23206,7 +23089,7 @@
       </p:sp>
       <p:sp>
         <p:nvSpPr>
-          <p:cNvPr id="36" name="Text 34"/>
+          <p:cNvPr id="35" name="Text 33"/>
           <p:cNvSpPr/>
           <p:nvPr/>
         </p:nvSpPr>
@@ -23237,7 +23120,7 @@
                 <a:ea typeface="Trebuchet MS" pitchFamily="34" charset="-122"/>
                 <a:cs typeface="Trebuchet MS" pitchFamily="34" charset="-120"/>
               </a:rPr>
-              <a:t>ver</a:t>
+              <a:t>tro</a:t>
             </a:r>
             <a:endParaRPr lang="en-US" sz="1400" dirty="0"/>
           </a:p>
@@ -23245,7 +23128,7 @@
       </p:sp>
       <p:sp>
         <p:nvSpPr>
-          <p:cNvPr id="37" name="Text 35"/>
+          <p:cNvPr id="36" name="Text 34"/>
           <p:cNvSpPr/>
           <p:nvPr/>
         </p:nvSpPr>
@@ -23284,7 +23167,7 @@
       </p:sp>
       <p:sp>
         <p:nvSpPr>
-          <p:cNvPr id="38" name="Shape 36"/>
+          <p:cNvPr id="37" name="Shape 35"/>
           <p:cNvSpPr/>
           <p:nvPr/>
         </p:nvSpPr>
@@ -23311,7 +23194,7 @@
       </p:sp>
       <p:sp>
         <p:nvSpPr>
-          <p:cNvPr id="39" name="Text 37"/>
+          <p:cNvPr id="38" name="Text 36"/>
           <p:cNvSpPr/>
           <p:nvPr/>
         </p:nvSpPr>
@@ -23342,7 +23225,7 @@
                 <a:ea typeface="Trebuchet MS" pitchFamily="34" charset="-122"/>
                 <a:cs typeface="Trebuchet MS" pitchFamily="34" charset="-120"/>
               </a:rPr>
-              <a:t>sa</a:t>
+              <a:t>ver</a:t>
             </a:r>
             <a:endParaRPr lang="en-US" sz="1400" dirty="0"/>
           </a:p>
@@ -23350,7 +23233,7 @@
       </p:sp>
       <p:sp>
         <p:nvSpPr>
-          <p:cNvPr id="40" name="Text 38"/>
+          <p:cNvPr id="39" name="Text 37"/>
           <p:cNvSpPr/>
           <p:nvPr/>
         </p:nvSpPr>
@@ -23389,7 +23272,7 @@
       </p:sp>
       <p:sp>
         <p:nvSpPr>
-          <p:cNvPr id="41" name="Shape 39"/>
+          <p:cNvPr id="40" name="Shape 38"/>
           <p:cNvSpPr/>
           <p:nvPr/>
         </p:nvSpPr>
@@ -23416,7 +23299,7 @@
       </p:sp>
       <p:sp>
         <p:nvSpPr>
-          <p:cNvPr id="42" name="Text 40"/>
+          <p:cNvPr id="41" name="Text 39"/>
           <p:cNvSpPr/>
           <p:nvPr/>
         </p:nvSpPr>
@@ -23447,7 +23330,7 @@
                 <a:ea typeface="Trebuchet MS" pitchFamily="34" charset="-122"/>
                 <a:cs typeface="Trebuchet MS" pitchFamily="34" charset="-120"/>
               </a:rPr>
-              <a:t>tion</a:t>
+              <a:t>sy</a:t>
             </a:r>
             <a:endParaRPr lang="en-US" sz="1400" dirty="0"/>
           </a:p>
@@ -23455,7 +23338,7 @@
       </p:sp>
       <p:sp>
         <p:nvSpPr>
-          <p:cNvPr id="43" name="Shape 41"/>
+          <p:cNvPr id="42" name="Shape 40"/>
           <p:cNvSpPr/>
           <p:nvPr/>
         </p:nvSpPr>
@@ -23482,7 +23365,7 @@
       </p:sp>
       <p:sp>
         <p:nvSpPr>
-          <p:cNvPr id="44" name="Text 42"/>
+          <p:cNvPr id="43" name="Text 41"/>
           <p:cNvSpPr/>
           <p:nvPr/>
         </p:nvSpPr>
@@ -23521,7 +23404,7 @@
       </p:sp>
       <p:sp>
         <p:nvSpPr>
-          <p:cNvPr id="45" name="Shape 43"/>
+          <p:cNvPr id="44" name="Shape 42"/>
           <p:cNvSpPr/>
           <p:nvPr/>
         </p:nvSpPr>
@@ -23548,7 +23431,7 @@
       </p:sp>
       <p:sp>
         <p:nvSpPr>
-          <p:cNvPr id="46" name="Shape 44"/>
+          <p:cNvPr id="45" name="Shape 43"/>
           <p:cNvSpPr/>
           <p:nvPr/>
         </p:nvSpPr>
@@ -23575,7 +23458,7 @@
       </p:sp>
       <p:sp>
         <p:nvSpPr>
-          <p:cNvPr id="47" name="Text 45"/>
+          <p:cNvPr id="46" name="Text 44"/>
           <p:cNvSpPr/>
           <p:nvPr/>
         </p:nvSpPr>
@@ -23614,7 +23497,7 @@
       </p:sp>
       <p:sp>
         <p:nvSpPr>
-          <p:cNvPr id="48" name="Text 46"/>
+          <p:cNvPr id="47" name="Text 45"/>
           <p:cNvSpPr/>
           <p:nvPr/>
         </p:nvSpPr>
@@ -23653,7 +23536,7 @@
       </p:sp>
       <p:sp>
         <p:nvSpPr>
-          <p:cNvPr id="49" name="Shape 47"/>
+          <p:cNvPr id="48" name="Shape 46"/>
           <p:cNvSpPr/>
           <p:nvPr/>
         </p:nvSpPr>
@@ -23680,7 +23563,7 @@
       </p:sp>
       <p:sp>
         <p:nvSpPr>
-          <p:cNvPr id="50" name="Text 48"/>
+          <p:cNvPr id="49" name="Text 47"/>
           <p:cNvSpPr/>
           <p:nvPr/>
         </p:nvSpPr>
@@ -23719,7 +23602,7 @@
       </p:sp>
       <p:sp>
         <p:nvSpPr>
-          <p:cNvPr id="51" name="Shape 49"/>
+          <p:cNvPr id="50" name="Shape 48"/>
           <p:cNvSpPr/>
           <p:nvPr/>
         </p:nvSpPr>
@@ -23746,7 +23629,7 @@
       </p:sp>
       <p:sp>
         <p:nvSpPr>
-          <p:cNvPr id="52" name="Text 50"/>
+          <p:cNvPr id="51" name="Text 49"/>
           <p:cNvSpPr/>
           <p:nvPr/>
         </p:nvSpPr>
@@ -23785,7 +23668,7 @@
       </p:sp>
       <p:sp>
         <p:nvSpPr>
-          <p:cNvPr id="53" name="Shape 51"/>
+          <p:cNvPr id="52" name="Shape 50"/>
           <p:cNvSpPr/>
           <p:nvPr/>
         </p:nvSpPr>
@@ -23812,7 +23695,7 @@
       </p:sp>
       <p:sp>
         <p:nvSpPr>
-          <p:cNvPr id="54" name="Text 52"/>
+          <p:cNvPr id="53" name="Text 51"/>
           <p:cNvSpPr/>
           <p:nvPr/>
         </p:nvSpPr>
@@ -23843,7 +23726,7 @@
                 <a:ea typeface="Trebuchet MS" pitchFamily="34" charset="-122"/>
                 <a:cs typeface="Trebuchet MS" pitchFamily="34" charset="-120"/>
               </a:rPr>
-              <a:t>v</a:t>
+              <a:t>t</a:t>
             </a:r>
             <a:endParaRPr lang="en-US" sz="900" dirty="0"/>
           </a:p>
@@ -23851,7 +23734,7 @@
       </p:sp>
       <p:sp>
         <p:nvSpPr>
-          <p:cNvPr id="55" name="Shape 53"/>
+          <p:cNvPr id="54" name="Shape 52"/>
           <p:cNvSpPr/>
           <p:nvPr/>
         </p:nvSpPr>
@@ -23878,7 +23761,7 @@
       </p:sp>
       <p:sp>
         <p:nvSpPr>
-          <p:cNvPr id="56" name="Text 54"/>
+          <p:cNvPr id="55" name="Text 53"/>
           <p:cNvSpPr/>
           <p:nvPr/>
         </p:nvSpPr>
@@ -23909,7 +23792,7 @@
                 <a:ea typeface="Trebuchet MS" pitchFamily="34" charset="-122"/>
                 <a:cs typeface="Trebuchet MS" pitchFamily="34" charset="-120"/>
               </a:rPr>
-              <a:t>er</a:t>
+              <a:t>r</a:t>
             </a:r>
             <a:endParaRPr lang="en-US" sz="900" dirty="0"/>
           </a:p>
@@ -23917,7 +23800,7 @@
       </p:sp>
       <p:sp>
         <p:nvSpPr>
-          <p:cNvPr id="57" name="Shape 55"/>
+          <p:cNvPr id="56" name="Shape 54"/>
           <p:cNvSpPr/>
           <p:nvPr/>
         </p:nvSpPr>
@@ -23944,7 +23827,7 @@
       </p:sp>
       <p:sp>
         <p:nvSpPr>
-          <p:cNvPr id="58" name="Text 56"/>
+          <p:cNvPr id="57" name="Text 55"/>
           <p:cNvSpPr/>
           <p:nvPr/>
         </p:nvSpPr>
@@ -23975,7 +23858,7 @@
                 <a:ea typeface="Trebuchet MS" pitchFamily="34" charset="-122"/>
                 <a:cs typeface="Trebuchet MS" pitchFamily="34" charset="-120"/>
               </a:rPr>
-              <a:t>s</a:t>
+              <a:t>o</a:t>
             </a:r>
             <a:endParaRPr lang="en-US" sz="900" dirty="0"/>
           </a:p>
@@ -23983,7 +23866,7 @@
       </p:sp>
       <p:sp>
         <p:nvSpPr>
-          <p:cNvPr id="59" name="Shape 57"/>
+          <p:cNvPr id="58" name="Shape 56"/>
           <p:cNvSpPr/>
           <p:nvPr/>
         </p:nvSpPr>
@@ -24010,7 +23893,7 @@
       </p:sp>
       <p:sp>
         <p:nvSpPr>
-          <p:cNvPr id="60" name="Text 58"/>
+          <p:cNvPr id="59" name="Text 57"/>
           <p:cNvSpPr/>
           <p:nvPr/>
         </p:nvSpPr>
@@ -24041,7 +23924,7 @@
                 <a:ea typeface="Trebuchet MS" pitchFamily="34" charset="-122"/>
                 <a:cs typeface="Trebuchet MS" pitchFamily="34" charset="-120"/>
               </a:rPr>
-              <a:t>a</a:t>
+              <a:t>v</a:t>
             </a:r>
             <a:endParaRPr lang="en-US" sz="900" dirty="0"/>
           </a:p>
@@ -24049,7 +23932,7 @@
       </p:sp>
       <p:sp>
         <p:nvSpPr>
-          <p:cNvPr id="61" name="Shape 59"/>
+          <p:cNvPr id="60" name="Shape 58"/>
           <p:cNvSpPr/>
           <p:nvPr/>
         </p:nvSpPr>
@@ -24076,7 +23959,7 @@
       </p:sp>
       <p:sp>
         <p:nvSpPr>
-          <p:cNvPr id="62" name="Text 60"/>
+          <p:cNvPr id="61" name="Text 59"/>
           <p:cNvSpPr/>
           <p:nvPr/>
         </p:nvSpPr>
@@ -24107,7 +23990,7 @@
                 <a:ea typeface="Trebuchet MS" pitchFamily="34" charset="-122"/>
                 <a:cs typeface="Trebuchet MS" pitchFamily="34" charset="-120"/>
               </a:rPr>
-              <a:t>t</a:t>
+              <a:t>er</a:t>
             </a:r>
             <a:endParaRPr lang="en-US" sz="900" dirty="0"/>
           </a:p>
@@ -24115,46 +23998,7 @@
       </p:sp>
       <p:sp>
         <p:nvSpPr>
-          <p:cNvPr id="63" name="Text 61"/>
-          <p:cNvSpPr/>
-          <p:nvPr/>
-        </p:nvSpPr>
-        <p:spPr>
-          <a:xfrm>
-            <a:off x="6525491" y="4572000"/>
-            <a:ext cx="603504" cy="219456"/>
-          </a:xfrm>
-          <a:prstGeom prst="rect">
-            <a:avLst/>
-          </a:prstGeom>
-          <a:noFill/>
-          <a:ln/>
-        </p:spPr>
-        <p:txBody>
-          <a:bodyPr wrap="square" lIns="0" tIns="0" rIns="0" bIns="0" rtlCol="0" anchor="t"/>
-          <a:lstStyle/>
-          <a:p>
-            <a:pPr algn="ctr" indent="0" marL="0">
-              <a:buNone/>
-            </a:pPr>
-            <a:r>
-              <a:rPr lang="en-US" sz="750" i="1" dirty="0">
-                <a:solidFill>
-                  <a:srgbClr val="94A3B8"/>
-                </a:solidFill>
-                <a:latin typeface="Calibri" pitchFamily="34" charset="0"/>
-                <a:ea typeface="Calibri" pitchFamily="34" charset="-122"/>
-                <a:cs typeface="Calibri" pitchFamily="34" charset="-120"/>
-              </a:rPr>
-              <a:t>/sh/</a:t>
-            </a:r>
-            <a:endParaRPr lang="en-US" sz="750" dirty="0"/>
-          </a:p>
-        </p:txBody>
-      </p:sp>
-      <p:sp>
-        <p:nvSpPr>
-          <p:cNvPr id="64" name="Shape 62"/>
+          <p:cNvPr id="62" name="Shape 60"/>
           <p:cNvSpPr/>
           <p:nvPr/>
         </p:nvSpPr>
@@ -24181,7 +24025,7 @@
       </p:sp>
       <p:sp>
         <p:nvSpPr>
-          <p:cNvPr id="65" name="Text 63"/>
+          <p:cNvPr id="63" name="Text 61"/>
           <p:cNvSpPr/>
           <p:nvPr/>
         </p:nvSpPr>
@@ -24212,7 +24056,7 @@
                 <a:ea typeface="Trebuchet MS" pitchFamily="34" charset="-122"/>
                 <a:cs typeface="Trebuchet MS" pitchFamily="34" charset="-120"/>
               </a:rPr>
-              <a:t>io</a:t>
+              <a:t>s</a:t>
             </a:r>
             <a:endParaRPr lang="en-US" sz="900" dirty="0"/>
           </a:p>
@@ -24220,7 +24064,7 @@
       </p:sp>
       <p:sp>
         <p:nvSpPr>
-          <p:cNvPr id="66" name="Shape 64"/>
+          <p:cNvPr id="64" name="Shape 62"/>
           <p:cNvSpPr/>
           <p:nvPr/>
         </p:nvSpPr>
@@ -24247,7 +24091,7 @@
       </p:sp>
       <p:sp>
         <p:nvSpPr>
-          <p:cNvPr id="67" name="Text 65"/>
+          <p:cNvPr id="65" name="Text 63"/>
           <p:cNvSpPr/>
           <p:nvPr/>
         </p:nvSpPr>
@@ -24278,7 +24122,7 @@
                 <a:ea typeface="Trebuchet MS" pitchFamily="34" charset="-122"/>
                 <a:cs typeface="Trebuchet MS" pitchFamily="34" charset="-120"/>
               </a:rPr>
-              <a:t>n</a:t>
+              <a:t>y</a:t>
             </a:r>
             <a:endParaRPr lang="en-US" sz="900" dirty="0"/>
           </a:p>
@@ -24709,7 +24553,7 @@
                 <a:ea typeface="Trebuchet MS" pitchFamily="34" charset="-122"/>
                 <a:cs typeface="Trebuchet MS" pitchFamily="34" charset="-120"/>
               </a:rPr>
-              <a:t>universe</a:t>
+              <a:t>conversion</a:t>
             </a:r>
             <a:endParaRPr lang="en-US" sz="2800" dirty="0"/>
           </a:p>
@@ -25536,7 +25380,7 @@
                 <a:ea typeface="Trebuchet MS" pitchFamily="34" charset="-122"/>
                 <a:cs typeface="Trebuchet MS" pitchFamily="34" charset="-120"/>
               </a:rPr>
-              <a:t>universe</a:t>
+              <a:t>conversion</a:t>
             </a:r>
             <a:endParaRPr lang="en-US" sz="2800" dirty="0"/>
           </a:p>
@@ -25675,7 +25519,7 @@
                 <a:ea typeface="Trebuchet MS" pitchFamily="34" charset="-122"/>
                 <a:cs typeface="Trebuchet MS" pitchFamily="34" charset="-120"/>
               </a:rPr>
-              <a:t>uni</a:t>
+              <a:t>con</a:t>
             </a:r>
             <a:endParaRPr lang="en-US" sz="1300" dirty="0"/>
           </a:p>
@@ -25714,7 +25558,7 @@
                 <a:ea typeface="Calibri" pitchFamily="34" charset="-122"/>
                 <a:cs typeface="Calibri" pitchFamily="34" charset="-120"/>
               </a:rPr>
-              <a:t>one</a:t>
+              <a:t>together, completely</a:t>
             </a:r>
             <a:endParaRPr lang="en-US" sz="850" dirty="0"/>
           </a:p>
@@ -25899,7 +25743,7 @@
                 <a:ea typeface="Trebuchet MS" pitchFamily="34" charset="-122"/>
                 <a:cs typeface="Trebuchet MS" pitchFamily="34" charset="-120"/>
               </a:rPr>
-              <a:t>e</a:t>
+              <a:t>ion</a:t>
             </a:r>
             <a:endParaRPr lang="en-US" sz="1300" dirty="0"/>
           </a:p>
@@ -25938,7 +25782,7 @@
                 <a:ea typeface="Calibri" pitchFamily="34" charset="-122"/>
                 <a:cs typeface="Calibri" pitchFamily="34" charset="-120"/>
               </a:rPr>
-              <a:t>noun marker</a:t>
+              <a:t>action or process</a:t>
             </a:r>
             <a:endParaRPr lang="en-US" sz="850" dirty="0"/>
           </a:p>
@@ -27352,7 +27196,7 @@
                 <a:ea typeface="Trebuchet MS" pitchFamily="34" charset="-122"/>
                 <a:cs typeface="Trebuchet MS" pitchFamily="34" charset="-120"/>
               </a:rPr>
-              <a:t>universe</a:t>
+              <a:t>conversion</a:t>
             </a:r>
             <a:endParaRPr lang="en-US" sz="2800" dirty="0"/>
           </a:p>
@@ -27491,7 +27335,7 @@
                 <a:ea typeface="Trebuchet MS" pitchFamily="34" charset="-122"/>
                 <a:cs typeface="Trebuchet MS" pitchFamily="34" charset="-120"/>
               </a:rPr>
-              <a:t>uni</a:t>
+              <a:t>con</a:t>
             </a:r>
             <a:endParaRPr lang="en-US" sz="1300" dirty="0"/>
           </a:p>
@@ -27530,7 +27374,7 @@
                 <a:ea typeface="Calibri" pitchFamily="34" charset="-122"/>
                 <a:cs typeface="Calibri" pitchFamily="34" charset="-120"/>
               </a:rPr>
-              <a:t>one</a:t>
+              <a:t>together, completely</a:t>
             </a:r>
             <a:endParaRPr lang="en-US" sz="850" dirty="0"/>
           </a:p>
@@ -27715,7 +27559,7 @@
                 <a:ea typeface="Trebuchet MS" pitchFamily="34" charset="-122"/>
                 <a:cs typeface="Trebuchet MS" pitchFamily="34" charset="-120"/>
               </a:rPr>
-              <a:t>e</a:t>
+              <a:t>ion</a:t>
             </a:r>
             <a:endParaRPr lang="en-US" sz="1300" dirty="0"/>
           </a:p>
@@ -27754,7 +27598,7 @@
                 <a:ea typeface="Calibri" pitchFamily="34" charset="-122"/>
                 <a:cs typeface="Calibri" pitchFamily="34" charset="-120"/>
               </a:rPr>
-              <a:t>noun marker</a:t>
+              <a:t>action or process</a:t>
             </a:r>
             <a:endParaRPr lang="en-US" sz="850" dirty="0"/>
           </a:p>
@@ -27913,7 +27757,7 @@
                 <a:ea typeface="Trebuchet MS" pitchFamily="34" charset="-122"/>
                 <a:cs typeface="Trebuchet MS" pitchFamily="34" charset="-120"/>
               </a:rPr>
-              <a:t>u</a:t>
+              <a:t>con</a:t>
             </a:r>
             <a:endParaRPr lang="en-US" sz="1400" dirty="0"/>
           </a:p>
@@ -28018,7 +27862,7 @@
                 <a:ea typeface="Trebuchet MS" pitchFamily="34" charset="-122"/>
                 <a:cs typeface="Trebuchet MS" pitchFamily="34" charset="-120"/>
               </a:rPr>
-              <a:t>ni</a:t>
+              <a:t>ver</a:t>
             </a:r>
             <a:endParaRPr lang="en-US" sz="1400" dirty="0"/>
           </a:p>
@@ -28123,7 +27967,7 @@
                 <a:ea typeface="Trebuchet MS" pitchFamily="34" charset="-122"/>
                 <a:cs typeface="Trebuchet MS" pitchFamily="34" charset="-120"/>
               </a:rPr>
-              <a:t>verse</a:t>
+              <a:t>sion</a:t>
             </a:r>
             <a:endParaRPr lang="en-US" sz="1400" dirty="0"/>
           </a:p>
@@ -28686,7 +28530,7 @@
                 <a:ea typeface="Trebuchet MS" pitchFamily="34" charset="-122"/>
                 <a:cs typeface="Trebuchet MS" pitchFamily="34" charset="-120"/>
               </a:rPr>
-              <a:t>universe</a:t>
+              <a:t>conversion</a:t>
             </a:r>
             <a:endParaRPr lang="en-US" sz="2800" dirty="0"/>
           </a:p>
@@ -28825,7 +28669,7 @@
                 <a:ea typeface="Trebuchet MS" pitchFamily="34" charset="-122"/>
                 <a:cs typeface="Trebuchet MS" pitchFamily="34" charset="-120"/>
               </a:rPr>
-              <a:t>uni</a:t>
+              <a:t>con</a:t>
             </a:r>
             <a:endParaRPr lang="en-US" sz="1300" dirty="0"/>
           </a:p>
@@ -28864,7 +28708,7 @@
                 <a:ea typeface="Calibri" pitchFamily="34" charset="-122"/>
                 <a:cs typeface="Calibri" pitchFamily="34" charset="-120"/>
               </a:rPr>
-              <a:t>one</a:t>
+              <a:t>together, completely</a:t>
             </a:r>
             <a:endParaRPr lang="en-US" sz="850" dirty="0"/>
           </a:p>
@@ -29049,7 +28893,7 @@
                 <a:ea typeface="Trebuchet MS" pitchFamily="34" charset="-122"/>
                 <a:cs typeface="Trebuchet MS" pitchFamily="34" charset="-120"/>
               </a:rPr>
-              <a:t>e</a:t>
+              <a:t>ion</a:t>
             </a:r>
             <a:endParaRPr lang="en-US" sz="1300" dirty="0"/>
           </a:p>
@@ -29088,7 +28932,7 @@
                 <a:ea typeface="Calibri" pitchFamily="34" charset="-122"/>
                 <a:cs typeface="Calibri" pitchFamily="34" charset="-120"/>
               </a:rPr>
-              <a:t>noun marker</a:t>
+              <a:t>action or process</a:t>
             </a:r>
             <a:endParaRPr lang="en-US" sz="850" dirty="0"/>
           </a:p>
@@ -29247,7 +29091,7 @@
                 <a:ea typeface="Trebuchet MS" pitchFamily="34" charset="-122"/>
                 <a:cs typeface="Trebuchet MS" pitchFamily="34" charset="-120"/>
               </a:rPr>
-              <a:t>u</a:t>
+              <a:t>con</a:t>
             </a:r>
             <a:endParaRPr lang="en-US" sz="1400" dirty="0"/>
           </a:p>
@@ -29352,7 +29196,7 @@
                 <a:ea typeface="Trebuchet MS" pitchFamily="34" charset="-122"/>
                 <a:cs typeface="Trebuchet MS" pitchFamily="34" charset="-120"/>
               </a:rPr>
-              <a:t>ni</a:t>
+              <a:t>ver</a:t>
             </a:r>
             <a:endParaRPr lang="en-US" sz="1400" dirty="0"/>
           </a:p>
@@ -29457,7 +29301,7 @@
                 <a:ea typeface="Trebuchet MS" pitchFamily="34" charset="-122"/>
                 <a:cs typeface="Trebuchet MS" pitchFamily="34" charset="-120"/>
               </a:rPr>
-              <a:t>verse</a:t>
+              <a:t>sion</a:t>
             </a:r>
             <a:endParaRPr lang="en-US" sz="1400" dirty="0"/>
           </a:p>
@@ -29564,7 +29408,7 @@
         </p:nvSpPr>
         <p:spPr>
           <a:xfrm>
-            <a:off x="2254649" y="4169664"/>
+            <a:off x="2023872" y="4169664"/>
             <a:ext cx="685800" cy="384048"/>
           </a:xfrm>
           <a:prstGeom prst="rect">
@@ -29591,7 +29435,7 @@
         </p:nvSpPr>
         <p:spPr>
           <a:xfrm>
-            <a:off x="2254649" y="4169664"/>
+            <a:off x="2023872" y="4169664"/>
             <a:ext cx="685800" cy="384048"/>
           </a:xfrm>
           <a:prstGeom prst="rect">
@@ -29616,7 +29460,7 @@
                 <a:ea typeface="Trebuchet MS" pitchFamily="34" charset="-122"/>
                 <a:cs typeface="Trebuchet MS" pitchFamily="34" charset="-120"/>
               </a:rPr>
-              <a:t>u</a:t>
+              <a:t>c</a:t>
             </a:r>
             <a:endParaRPr lang="en-US" sz="900" dirty="0"/>
           </a:p>
@@ -29624,13 +29468,52 @@
       </p:sp>
       <p:sp>
         <p:nvSpPr>
-          <p:cNvPr id="41" name="Shape 39"/>
-          <p:cNvSpPr/>
-          <p:nvPr/>
-        </p:nvSpPr>
-        <p:spPr>
-          <a:xfrm>
-            <a:off x="3293146" y="4169664"/>
+          <p:cNvPr id="41" name="Text 39"/>
+          <p:cNvSpPr/>
+          <p:nvPr/>
+        </p:nvSpPr>
+        <p:spPr>
+          <a:xfrm>
+            <a:off x="2023872" y="4572000"/>
+            <a:ext cx="685800" cy="219456"/>
+          </a:xfrm>
+          <a:prstGeom prst="rect">
+            <a:avLst/>
+          </a:prstGeom>
+          <a:noFill/>
+          <a:ln/>
+        </p:spPr>
+        <p:txBody>
+          <a:bodyPr wrap="square" lIns="0" tIns="0" rIns="0" bIns="0" rtlCol="0" anchor="t"/>
+          <a:lstStyle/>
+          <a:p>
+            <a:pPr algn="ctr" indent="0" marL="0">
+              <a:buNone/>
+            </a:pPr>
+            <a:r>
+              <a:rPr lang="en-US" sz="750" i="1" dirty="0">
+                <a:solidFill>
+                  <a:srgbClr val="94A3B8"/>
+                </a:solidFill>
+                <a:latin typeface="Calibri" pitchFamily="34" charset="0"/>
+                <a:ea typeface="Calibri" pitchFamily="34" charset="-122"/>
+                <a:cs typeface="Calibri" pitchFamily="34" charset="-120"/>
+              </a:rPr>
+              <a:t>/k/</a:t>
+            </a:r>
+            <a:endParaRPr lang="en-US" sz="750" dirty="0"/>
+          </a:p>
+        </p:txBody>
+      </p:sp>
+      <p:sp>
+        <p:nvSpPr>
+          <p:cNvPr id="42" name="Shape 40"/>
+          <p:cNvSpPr/>
+          <p:nvPr/>
+        </p:nvSpPr>
+        <p:spPr>
+          <a:xfrm>
+            <a:off x="2831592" y="4169664"/>
             <a:ext cx="685800" cy="384048"/>
           </a:xfrm>
           <a:prstGeom prst="rect">
@@ -29651,13 +29534,13 @@
       </p:sp>
       <p:sp>
         <p:nvSpPr>
-          <p:cNvPr id="42" name="Text 40"/>
-          <p:cNvSpPr/>
-          <p:nvPr/>
-        </p:nvSpPr>
-        <p:spPr>
-          <a:xfrm>
-            <a:off x="3293146" y="4169664"/>
+          <p:cNvPr id="43" name="Text 41"/>
+          <p:cNvSpPr/>
+          <p:nvPr/>
+        </p:nvSpPr>
+        <p:spPr>
+          <a:xfrm>
+            <a:off x="2831592" y="4169664"/>
             <a:ext cx="685800" cy="384048"/>
           </a:xfrm>
           <a:prstGeom prst="rect">
@@ -29682,7 +29565,7 @@
                 <a:ea typeface="Trebuchet MS" pitchFamily="34" charset="-122"/>
                 <a:cs typeface="Trebuchet MS" pitchFamily="34" charset="-120"/>
               </a:rPr>
-              <a:t>n</a:t>
+              <a:t>o</a:t>
             </a:r>
             <a:endParaRPr lang="en-US" sz="900" dirty="0"/>
           </a:p>
@@ -29690,13 +29573,13 @@
       </p:sp>
       <p:sp>
         <p:nvSpPr>
-          <p:cNvPr id="43" name="Shape 41"/>
-          <p:cNvSpPr/>
-          <p:nvPr/>
-        </p:nvSpPr>
-        <p:spPr>
-          <a:xfrm>
-            <a:off x="4331643" y="4169664"/>
+          <p:cNvPr id="44" name="Shape 42"/>
+          <p:cNvSpPr/>
+          <p:nvPr/>
+        </p:nvSpPr>
+        <p:spPr>
+          <a:xfrm>
+            <a:off x="3639312" y="4169664"/>
             <a:ext cx="685800" cy="384048"/>
           </a:xfrm>
           <a:prstGeom prst="rect">
@@ -29717,13 +29600,13 @@
       </p:sp>
       <p:sp>
         <p:nvSpPr>
-          <p:cNvPr id="44" name="Text 42"/>
-          <p:cNvSpPr/>
-          <p:nvPr/>
-        </p:nvSpPr>
-        <p:spPr>
-          <a:xfrm>
-            <a:off x="4331643" y="4169664"/>
+          <p:cNvPr id="45" name="Text 43"/>
+          <p:cNvSpPr/>
+          <p:nvPr/>
+        </p:nvSpPr>
+        <p:spPr>
+          <a:xfrm>
+            <a:off x="3639312" y="4169664"/>
             <a:ext cx="685800" cy="384048"/>
           </a:xfrm>
           <a:prstGeom prst="rect">
@@ -29748,7 +29631,7 @@
                 <a:ea typeface="Trebuchet MS" pitchFamily="34" charset="-122"/>
                 <a:cs typeface="Trebuchet MS" pitchFamily="34" charset="-120"/>
               </a:rPr>
-              <a:t>i</a:t>
+              <a:t>n</a:t>
             </a:r>
             <a:endParaRPr lang="en-US" sz="900" dirty="0"/>
           </a:p>
@@ -29756,13 +29639,13 @@
       </p:sp>
       <p:sp>
         <p:nvSpPr>
-          <p:cNvPr id="45" name="Shape 43"/>
-          <p:cNvSpPr/>
-          <p:nvPr/>
-        </p:nvSpPr>
-        <p:spPr>
-          <a:xfrm>
-            <a:off x="5370141" y="4169664"/>
+          <p:cNvPr id="46" name="Shape 44"/>
+          <p:cNvSpPr/>
+          <p:nvPr/>
+        </p:nvSpPr>
+        <p:spPr>
+          <a:xfrm>
+            <a:off x="4447032" y="4169664"/>
             <a:ext cx="685800" cy="384048"/>
           </a:xfrm>
           <a:prstGeom prst="rect">
@@ -29783,13 +29666,13 @@
       </p:sp>
       <p:sp>
         <p:nvSpPr>
-          <p:cNvPr id="46" name="Text 44"/>
-          <p:cNvSpPr/>
-          <p:nvPr/>
-        </p:nvSpPr>
-        <p:spPr>
-          <a:xfrm>
-            <a:off x="5370141" y="4169664"/>
+          <p:cNvPr id="47" name="Text 45"/>
+          <p:cNvSpPr/>
+          <p:nvPr/>
+        </p:nvSpPr>
+        <p:spPr>
+          <a:xfrm>
+            <a:off x="4447032" y="4169664"/>
             <a:ext cx="685800" cy="384048"/>
           </a:xfrm>
           <a:prstGeom prst="rect">
@@ -29822,13 +29705,13 @@
       </p:sp>
       <p:sp>
         <p:nvSpPr>
-          <p:cNvPr id="47" name="Shape 45"/>
-          <p:cNvSpPr/>
-          <p:nvPr/>
-        </p:nvSpPr>
-        <p:spPr>
-          <a:xfrm>
-            <a:off x="6408638" y="4169664"/>
+          <p:cNvPr id="48" name="Shape 46"/>
+          <p:cNvSpPr/>
+          <p:nvPr/>
+        </p:nvSpPr>
+        <p:spPr>
+          <a:xfrm>
+            <a:off x="5254752" y="4169664"/>
             <a:ext cx="685800" cy="384048"/>
           </a:xfrm>
           <a:prstGeom prst="rect">
@@ -29849,13 +29732,13 @@
       </p:sp>
       <p:sp>
         <p:nvSpPr>
-          <p:cNvPr id="48" name="Text 46"/>
-          <p:cNvSpPr/>
-          <p:nvPr/>
-        </p:nvSpPr>
-        <p:spPr>
-          <a:xfrm>
-            <a:off x="6408638" y="4169664"/>
+          <p:cNvPr id="49" name="Text 47"/>
+          <p:cNvSpPr/>
+          <p:nvPr/>
+        </p:nvSpPr>
+        <p:spPr>
+          <a:xfrm>
+            <a:off x="5254752" y="4169664"/>
             <a:ext cx="685800" cy="384048"/>
           </a:xfrm>
           <a:prstGeom prst="rect">
@@ -29888,13 +29771,13 @@
       </p:sp>
       <p:sp>
         <p:nvSpPr>
-          <p:cNvPr id="49" name="Shape 47"/>
-          <p:cNvSpPr/>
-          <p:nvPr/>
-        </p:nvSpPr>
-        <p:spPr>
-          <a:xfrm>
-            <a:off x="7447135" y="4169664"/>
+          <p:cNvPr id="50" name="Shape 48"/>
+          <p:cNvSpPr/>
+          <p:nvPr/>
+        </p:nvSpPr>
+        <p:spPr>
+          <a:xfrm>
+            <a:off x="6062472" y="4169664"/>
             <a:ext cx="685800" cy="384048"/>
           </a:xfrm>
           <a:prstGeom prst="rect">
@@ -29915,13 +29798,13 @@
       </p:sp>
       <p:sp>
         <p:nvSpPr>
-          <p:cNvPr id="50" name="Text 48"/>
-          <p:cNvSpPr/>
-          <p:nvPr/>
-        </p:nvSpPr>
-        <p:spPr>
-          <a:xfrm>
-            <a:off x="7447135" y="4169664"/>
+          <p:cNvPr id="51" name="Text 49"/>
+          <p:cNvSpPr/>
+          <p:nvPr/>
+        </p:nvSpPr>
+        <p:spPr>
+          <a:xfrm>
+            <a:off x="6062472" y="4169664"/>
             <a:ext cx="685800" cy="384048"/>
           </a:xfrm>
           <a:prstGeom prst="rect">
@@ -29946,7 +29829,7 @@
                 <a:ea typeface="Trebuchet MS" pitchFamily="34" charset="-122"/>
                 <a:cs typeface="Trebuchet MS" pitchFamily="34" charset="-120"/>
               </a:rPr>
-              <a:t>se</a:t>
+              <a:t>s</a:t>
             </a:r>
             <a:endParaRPr lang="en-US" sz="900" dirty="0"/>
           </a:p>
@@ -29954,13 +29837,13 @@
       </p:sp>
       <p:sp>
         <p:nvSpPr>
-          <p:cNvPr id="51" name="Text 49"/>
-          <p:cNvSpPr/>
-          <p:nvPr/>
-        </p:nvSpPr>
-        <p:spPr>
-          <a:xfrm>
-            <a:off x="7447135" y="4572000"/>
+          <p:cNvPr id="52" name="Text 50"/>
+          <p:cNvSpPr/>
+          <p:nvPr/>
+        </p:nvSpPr>
+        <p:spPr>
+          <a:xfrm>
+            <a:off x="6062472" y="4572000"/>
             <a:ext cx="685800" cy="219456"/>
           </a:xfrm>
           <a:prstGeom prst="rect">
@@ -29985,9 +29868,141 @@
                 <a:ea typeface="Calibri" pitchFamily="34" charset="-122"/>
                 <a:cs typeface="Calibri" pitchFamily="34" charset="-120"/>
               </a:rPr>
-              <a:t>/s/</a:t>
+              <a:t>/zh/</a:t>
             </a:r>
             <a:endParaRPr lang="en-US" sz="750" dirty="0"/>
+          </a:p>
+        </p:txBody>
+      </p:sp>
+      <p:sp>
+        <p:nvSpPr>
+          <p:cNvPr id="53" name="Shape 51"/>
+          <p:cNvSpPr/>
+          <p:nvPr/>
+        </p:nvSpPr>
+        <p:spPr>
+          <a:xfrm>
+            <a:off x="6870192" y="4169664"/>
+            <a:ext cx="685800" cy="384048"/>
+          </a:xfrm>
+          <a:prstGeom prst="rect">
+            <a:avLst>
+              <a:gd name="adj" fmla="val 9524"/>
+            </a:avLst>
+          </a:prstGeom>
+          <a:solidFill>
+            <a:srgbClr val="FFFFFF"/>
+          </a:solidFill>
+          <a:ln w="12700">
+            <a:solidFill>
+              <a:srgbClr val="DB2777"/>
+            </a:solidFill>
+            <a:prstDash val="solid"/>
+          </a:ln>
+        </p:spPr>
+      </p:sp>
+      <p:sp>
+        <p:nvSpPr>
+          <p:cNvPr id="54" name="Text 52"/>
+          <p:cNvSpPr/>
+          <p:nvPr/>
+        </p:nvSpPr>
+        <p:spPr>
+          <a:xfrm>
+            <a:off x="6870192" y="4169664"/>
+            <a:ext cx="685800" cy="384048"/>
+          </a:xfrm>
+          <a:prstGeom prst="rect">
+            <a:avLst/>
+          </a:prstGeom>
+          <a:noFill/>
+          <a:ln/>
+        </p:spPr>
+        <p:txBody>
+          <a:bodyPr wrap="square" lIns="0" tIns="0" rIns="0" bIns="0" rtlCol="0" anchor="ctr"/>
+          <a:lstStyle/>
+          <a:p>
+            <a:pPr algn="ctr" indent="0" marL="0">
+              <a:buNone/>
+            </a:pPr>
+            <a:r>
+              <a:rPr lang="en-US" sz="900" b="1" dirty="0">
+                <a:solidFill>
+                  <a:srgbClr val="9D174D"/>
+                </a:solidFill>
+                <a:latin typeface="Trebuchet MS" pitchFamily="34" charset="0"/>
+                <a:ea typeface="Trebuchet MS" pitchFamily="34" charset="-122"/>
+                <a:cs typeface="Trebuchet MS" pitchFamily="34" charset="-120"/>
+              </a:rPr>
+              <a:t>io</a:t>
+            </a:r>
+            <a:endParaRPr lang="en-US" sz="900" dirty="0"/>
+          </a:p>
+        </p:txBody>
+      </p:sp>
+      <p:sp>
+        <p:nvSpPr>
+          <p:cNvPr id="55" name="Shape 53"/>
+          <p:cNvSpPr/>
+          <p:nvPr/>
+        </p:nvSpPr>
+        <p:spPr>
+          <a:xfrm>
+            <a:off x="7677912" y="4169664"/>
+            <a:ext cx="685800" cy="384048"/>
+          </a:xfrm>
+          <a:prstGeom prst="rect">
+            <a:avLst>
+              <a:gd name="adj" fmla="val 9524"/>
+            </a:avLst>
+          </a:prstGeom>
+          <a:solidFill>
+            <a:srgbClr val="FFFFFF"/>
+          </a:solidFill>
+          <a:ln w="12700">
+            <a:solidFill>
+              <a:srgbClr val="DB2777"/>
+            </a:solidFill>
+            <a:prstDash val="solid"/>
+          </a:ln>
+        </p:spPr>
+      </p:sp>
+      <p:sp>
+        <p:nvSpPr>
+          <p:cNvPr id="56" name="Text 54"/>
+          <p:cNvSpPr/>
+          <p:nvPr/>
+        </p:nvSpPr>
+        <p:spPr>
+          <a:xfrm>
+            <a:off x="7677912" y="4169664"/>
+            <a:ext cx="685800" cy="384048"/>
+          </a:xfrm>
+          <a:prstGeom prst="rect">
+            <a:avLst/>
+          </a:prstGeom>
+          <a:noFill/>
+          <a:ln/>
+        </p:spPr>
+        <p:txBody>
+          <a:bodyPr wrap="square" lIns="0" tIns="0" rIns="0" bIns="0" rtlCol="0" anchor="ctr"/>
+          <a:lstStyle/>
+          <a:p>
+            <a:pPr algn="ctr" indent="0" marL="0">
+              <a:buNone/>
+            </a:pPr>
+            <a:r>
+              <a:rPr lang="en-US" sz="900" b="1" dirty="0">
+                <a:solidFill>
+                  <a:srgbClr val="9D174D"/>
+                </a:solidFill>
+                <a:latin typeface="Trebuchet MS" pitchFamily="34" charset="0"/>
+                <a:ea typeface="Trebuchet MS" pitchFamily="34" charset="-122"/>
+                <a:cs typeface="Trebuchet MS" pitchFamily="34" charset="-120"/>
+              </a:rPr>
+              <a:t>n</a:t>
+            </a:r>
+            <a:endParaRPr lang="en-US" sz="900" dirty="0"/>
           </a:p>
         </p:txBody>
       </p:sp>
@@ -31323,7 +31338,7 @@
         </p:nvSpPr>
         <p:spPr>
           <a:xfrm>
-            <a:off x="2938272" y="2258568"/>
+            <a:off x="2221992" y="2258568"/>
             <a:ext cx="1828800" cy="292608"/>
           </a:xfrm>
           <a:prstGeom prst="rect">
@@ -31357,7 +31372,7 @@
         </p:nvSpPr>
         <p:spPr>
           <a:xfrm>
-            <a:off x="2938272" y="2258568"/>
+            <a:off x="2221992" y="2258568"/>
             <a:ext cx="1828800" cy="292608"/>
           </a:xfrm>
           <a:prstGeom prst="rect">
@@ -31396,7 +31411,7 @@
         </p:nvSpPr>
         <p:spPr>
           <a:xfrm>
-            <a:off x="2938272" y="2569464"/>
+            <a:off x="2221992" y="2569464"/>
             <a:ext cx="1828800" cy="201168"/>
           </a:xfrm>
           <a:prstGeom prst="rect">
@@ -31435,7 +31450,7 @@
         </p:nvSpPr>
         <p:spPr>
           <a:xfrm>
-            <a:off x="5803392" y="2258568"/>
+            <a:off x="4370832" y="2258568"/>
             <a:ext cx="1828800" cy="292608"/>
           </a:xfrm>
           <a:prstGeom prst="rect">
@@ -31469,7 +31484,7 @@
         </p:nvSpPr>
         <p:spPr>
           <a:xfrm>
-            <a:off x="5803392" y="2258568"/>
+            <a:off x="4370832" y="2258568"/>
             <a:ext cx="1828800" cy="292608"/>
           </a:xfrm>
           <a:prstGeom prst="rect">
@@ -31494,7 +31509,7 @@
                 <a:ea typeface="Trebuchet MS" pitchFamily="34" charset="-122"/>
                 <a:cs typeface="Trebuchet MS" pitchFamily="34" charset="-120"/>
               </a:rPr>
-              <a:t>atile</a:t>
+              <a:t>at</a:t>
             </a:r>
             <a:endParaRPr lang="en-US" sz="1300" dirty="0"/>
           </a:p>
@@ -31508,7 +31523,7 @@
         </p:nvSpPr>
         <p:spPr>
           <a:xfrm>
-            <a:off x="5803392" y="2569464"/>
+            <a:off x="4370832" y="2569464"/>
             <a:ext cx="1828800" cy="201168"/>
           </a:xfrm>
           <a:prstGeom prst="rect">
@@ -31533,6 +31548,118 @@
                 <a:ea typeface="Calibri" pitchFamily="34" charset="-122"/>
                 <a:cs typeface="Calibri" pitchFamily="34" charset="-120"/>
               </a:rPr>
+              <a:t>connecting form</a:t>
+            </a:r>
+            <a:endParaRPr lang="en-US" sz="850" dirty="0"/>
+          </a:p>
+        </p:txBody>
+      </p:sp>
+      <p:sp>
+        <p:nvSpPr>
+          <p:cNvPr id="22" name="Shape 20"/>
+          <p:cNvSpPr/>
+          <p:nvPr/>
+        </p:nvSpPr>
+        <p:spPr>
+          <a:xfrm>
+            <a:off x="6519672" y="2258568"/>
+            <a:ext cx="1828800" cy="292608"/>
+          </a:xfrm>
+          <a:prstGeom prst="rect">
+            <a:avLst>
+              <a:gd name="adj" fmla="val 25000"/>
+            </a:avLst>
+          </a:prstGeom>
+          <a:solidFill>
+            <a:srgbClr val="FCE7F3"/>
+          </a:solidFill>
+          <a:ln w="19050">
+            <a:solidFill>
+              <a:srgbClr val="DB2777"/>
+            </a:solidFill>
+            <a:prstDash val="solid"/>
+          </a:ln>
+          <a:effectLst>
+            <a:outerShdw sx="100000" sy="100000" kx="0" ky="0" algn="bl" rotWithShape="0" blurRad="101600" dist="38100" dir="8100000">
+              <a:srgbClr val="000000">
+                <a:alpha val="12000"/>
+              </a:srgbClr>
+            </a:outerShdw>
+          </a:effectLst>
+        </p:spPr>
+      </p:sp>
+      <p:sp>
+        <p:nvSpPr>
+          <p:cNvPr id="23" name="Text 21"/>
+          <p:cNvSpPr/>
+          <p:nvPr/>
+        </p:nvSpPr>
+        <p:spPr>
+          <a:xfrm>
+            <a:off x="6519672" y="2258568"/>
+            <a:ext cx="1828800" cy="292608"/>
+          </a:xfrm>
+          <a:prstGeom prst="rect">
+            <a:avLst/>
+          </a:prstGeom>
+          <a:noFill/>
+          <a:ln/>
+        </p:spPr>
+        <p:txBody>
+          <a:bodyPr wrap="square" lIns="0" tIns="0" rIns="0" bIns="0" rtlCol="0" anchor="ctr"/>
+          <a:lstStyle/>
+          <a:p>
+            <a:pPr algn="ctr" indent="0" marL="0">
+              <a:buNone/>
+            </a:pPr>
+            <a:r>
+              <a:rPr lang="en-US" sz="1300" b="1" dirty="0">
+                <a:solidFill>
+                  <a:srgbClr val="9D174D"/>
+                </a:solidFill>
+                <a:latin typeface="Trebuchet MS" pitchFamily="34" charset="0"/>
+                <a:ea typeface="Trebuchet MS" pitchFamily="34" charset="-122"/>
+                <a:cs typeface="Trebuchet MS" pitchFamily="34" charset="-120"/>
+              </a:rPr>
+              <a:t>ile</a:t>
+            </a:r>
+            <a:endParaRPr lang="en-US" sz="1300" dirty="0"/>
+          </a:p>
+        </p:txBody>
+      </p:sp>
+      <p:sp>
+        <p:nvSpPr>
+          <p:cNvPr id="24" name="Text 22"/>
+          <p:cNvSpPr/>
+          <p:nvPr/>
+        </p:nvSpPr>
+        <p:spPr>
+          <a:xfrm>
+            <a:off x="6519672" y="2569464"/>
+            <a:ext cx="1828800" cy="201168"/>
+          </a:xfrm>
+          <a:prstGeom prst="rect">
+            <a:avLst/>
+          </a:prstGeom>
+          <a:noFill/>
+          <a:ln/>
+        </p:spPr>
+        <p:txBody>
+          <a:bodyPr wrap="square" lIns="0" tIns="0" rIns="0" bIns="0" rtlCol="0" anchor="t"/>
+          <a:lstStyle/>
+          <a:p>
+            <a:pPr algn="ctr" indent="0" marL="0">
+              <a:buNone/>
+            </a:pPr>
+            <a:r>
+              <a:rPr lang="en-US" sz="850" dirty="0">
+                <a:solidFill>
+                  <a:srgbClr val="475569"/>
+                </a:solidFill>
+                <a:latin typeface="Calibri" pitchFamily="34" charset="0"/>
+                <a:ea typeface="Calibri" pitchFamily="34" charset="-122"/>
+                <a:cs typeface="Calibri" pitchFamily="34" charset="-120"/>
+              </a:rPr>
               <a:t>able to, capable of</a:t>
             </a:r>
             <a:endParaRPr lang="en-US" sz="850" dirty="0"/>
@@ -31541,7 +31668,7 @@
       </p:sp>
       <p:sp>
         <p:nvSpPr>
-          <p:cNvPr id="22" name="Shape 20"/>
+          <p:cNvPr id="25" name="Shape 23"/>
           <p:cNvSpPr/>
           <p:nvPr/>
         </p:nvSpPr>
@@ -31568,7 +31695,7 @@
       </p:sp>
       <p:sp>
         <p:nvSpPr>
-          <p:cNvPr id="23" name="Text 21"/>
+          <p:cNvPr id="26" name="Text 24"/>
           <p:cNvSpPr/>
           <p:nvPr/>
         </p:nvSpPr>
@@ -31607,7 +31734,7 @@
       </p:sp>
       <p:sp>
         <p:nvSpPr>
-          <p:cNvPr id="24" name="Shape 22"/>
+          <p:cNvPr id="27" name="Shape 25"/>
           <p:cNvSpPr/>
           <p:nvPr/>
         </p:nvSpPr>
@@ -31634,7 +31761,7 @@
       </p:sp>
       <p:sp>
         <p:nvSpPr>
-          <p:cNvPr id="25" name="Text 23"/>
+          <p:cNvPr id="28" name="Text 26"/>
           <p:cNvSpPr/>
           <p:nvPr/>
         </p:nvSpPr>
@@ -31673,7 +31800,7 @@
       </p:sp>
       <p:sp>
         <p:nvSpPr>
-          <p:cNvPr id="26" name="Shape 24"/>
+          <p:cNvPr id="29" name="Shape 27"/>
           <p:cNvSpPr/>
           <p:nvPr/>
         </p:nvSpPr>
@@ -31700,7 +31827,7 @@
       </p:sp>
       <p:sp>
         <p:nvSpPr>
-          <p:cNvPr id="27" name="Text 25"/>
+          <p:cNvPr id="30" name="Text 28"/>
           <p:cNvSpPr/>
           <p:nvPr/>
         </p:nvSpPr>
@@ -31739,7 +31866,7 @@
       </p:sp>
       <p:sp>
         <p:nvSpPr>
-          <p:cNvPr id="28" name="Shape 26"/>
+          <p:cNvPr id="31" name="Shape 29"/>
           <p:cNvSpPr/>
           <p:nvPr/>
         </p:nvSpPr>
@@ -31766,7 +31893,7 @@
       </p:sp>
       <p:sp>
         <p:nvSpPr>
-          <p:cNvPr id="29" name="Text 27"/>
+          <p:cNvPr id="32" name="Text 30"/>
           <p:cNvSpPr/>
           <p:nvPr/>
         </p:nvSpPr>
@@ -32308,7 +32435,7 @@
         </p:nvSpPr>
         <p:spPr>
           <a:xfrm>
-            <a:off x="2938272" y="2258568"/>
+            <a:off x="2221992" y="2258568"/>
             <a:ext cx="1828800" cy="292608"/>
           </a:xfrm>
           <a:prstGeom prst="rect">
@@ -32342,7 +32469,7 @@
         </p:nvSpPr>
         <p:spPr>
           <a:xfrm>
-            <a:off x="2938272" y="2258568"/>
+            <a:off x="2221992" y="2258568"/>
             <a:ext cx="1828800" cy="292608"/>
           </a:xfrm>
           <a:prstGeom prst="rect">
@@ -32381,7 +32508,7 @@
         </p:nvSpPr>
         <p:spPr>
           <a:xfrm>
-            <a:off x="2938272" y="2569464"/>
+            <a:off x="2221992" y="2569464"/>
             <a:ext cx="1828800" cy="201168"/>
           </a:xfrm>
           <a:prstGeom prst="rect">
@@ -32420,7 +32547,7 @@
         </p:nvSpPr>
         <p:spPr>
           <a:xfrm>
-            <a:off x="5803392" y="2258568"/>
+            <a:off x="4370832" y="2258568"/>
             <a:ext cx="1828800" cy="292608"/>
           </a:xfrm>
           <a:prstGeom prst="rect">
@@ -32454,7 +32581,7 @@
         </p:nvSpPr>
         <p:spPr>
           <a:xfrm>
-            <a:off x="5803392" y="2258568"/>
+            <a:off x="4370832" y="2258568"/>
             <a:ext cx="1828800" cy="292608"/>
           </a:xfrm>
           <a:prstGeom prst="rect">
@@ -32479,7 +32606,7 @@
                 <a:ea typeface="Trebuchet MS" pitchFamily="34" charset="-122"/>
                 <a:cs typeface="Trebuchet MS" pitchFamily="34" charset="-120"/>
               </a:rPr>
-              <a:t>atile</a:t>
+              <a:t>at</a:t>
             </a:r>
             <a:endParaRPr lang="en-US" sz="1300" dirty="0"/>
           </a:p>
@@ -32493,7 +32620,7 @@
         </p:nvSpPr>
         <p:spPr>
           <a:xfrm>
-            <a:off x="5803392" y="2569464"/>
+            <a:off x="4370832" y="2569464"/>
             <a:ext cx="1828800" cy="201168"/>
           </a:xfrm>
           <a:prstGeom prst="rect">
@@ -32518,6 +32645,118 @@
                 <a:ea typeface="Calibri" pitchFamily="34" charset="-122"/>
                 <a:cs typeface="Calibri" pitchFamily="34" charset="-120"/>
               </a:rPr>
+              <a:t>connecting form</a:t>
+            </a:r>
+            <a:endParaRPr lang="en-US" sz="850" dirty="0"/>
+          </a:p>
+        </p:txBody>
+      </p:sp>
+      <p:sp>
+        <p:nvSpPr>
+          <p:cNvPr id="22" name="Shape 20"/>
+          <p:cNvSpPr/>
+          <p:nvPr/>
+        </p:nvSpPr>
+        <p:spPr>
+          <a:xfrm>
+            <a:off x="6519672" y="2258568"/>
+            <a:ext cx="1828800" cy="292608"/>
+          </a:xfrm>
+          <a:prstGeom prst="rect">
+            <a:avLst>
+              <a:gd name="adj" fmla="val 25000"/>
+            </a:avLst>
+          </a:prstGeom>
+          <a:solidFill>
+            <a:srgbClr val="FCE7F3"/>
+          </a:solidFill>
+          <a:ln w="19050">
+            <a:solidFill>
+              <a:srgbClr val="DB2777"/>
+            </a:solidFill>
+            <a:prstDash val="solid"/>
+          </a:ln>
+          <a:effectLst>
+            <a:outerShdw sx="100000" sy="100000" kx="0" ky="0" algn="bl" rotWithShape="0" blurRad="101600" dist="38100" dir="8100000">
+              <a:srgbClr val="000000">
+                <a:alpha val="12000"/>
+              </a:srgbClr>
+            </a:outerShdw>
+          </a:effectLst>
+        </p:spPr>
+      </p:sp>
+      <p:sp>
+        <p:nvSpPr>
+          <p:cNvPr id="23" name="Text 21"/>
+          <p:cNvSpPr/>
+          <p:nvPr/>
+        </p:nvSpPr>
+        <p:spPr>
+          <a:xfrm>
+            <a:off x="6519672" y="2258568"/>
+            <a:ext cx="1828800" cy="292608"/>
+          </a:xfrm>
+          <a:prstGeom prst="rect">
+            <a:avLst/>
+          </a:prstGeom>
+          <a:noFill/>
+          <a:ln/>
+        </p:spPr>
+        <p:txBody>
+          <a:bodyPr wrap="square" lIns="0" tIns="0" rIns="0" bIns="0" rtlCol="0" anchor="ctr"/>
+          <a:lstStyle/>
+          <a:p>
+            <a:pPr algn="ctr" indent="0" marL="0">
+              <a:buNone/>
+            </a:pPr>
+            <a:r>
+              <a:rPr lang="en-US" sz="1300" b="1" dirty="0">
+                <a:solidFill>
+                  <a:srgbClr val="9D174D"/>
+                </a:solidFill>
+                <a:latin typeface="Trebuchet MS" pitchFamily="34" charset="0"/>
+                <a:ea typeface="Trebuchet MS" pitchFamily="34" charset="-122"/>
+                <a:cs typeface="Trebuchet MS" pitchFamily="34" charset="-120"/>
+              </a:rPr>
+              <a:t>ile</a:t>
+            </a:r>
+            <a:endParaRPr lang="en-US" sz="1300" dirty="0"/>
+          </a:p>
+        </p:txBody>
+      </p:sp>
+      <p:sp>
+        <p:nvSpPr>
+          <p:cNvPr id="24" name="Text 22"/>
+          <p:cNvSpPr/>
+          <p:nvPr/>
+        </p:nvSpPr>
+        <p:spPr>
+          <a:xfrm>
+            <a:off x="6519672" y="2569464"/>
+            <a:ext cx="1828800" cy="201168"/>
+          </a:xfrm>
+          <a:prstGeom prst="rect">
+            <a:avLst/>
+          </a:prstGeom>
+          <a:noFill/>
+          <a:ln/>
+        </p:spPr>
+        <p:txBody>
+          <a:bodyPr wrap="square" lIns="0" tIns="0" rIns="0" bIns="0" rtlCol="0" anchor="t"/>
+          <a:lstStyle/>
+          <a:p>
+            <a:pPr algn="ctr" indent="0" marL="0">
+              <a:buNone/>
+            </a:pPr>
+            <a:r>
+              <a:rPr lang="en-US" sz="850" dirty="0">
+                <a:solidFill>
+                  <a:srgbClr val="475569"/>
+                </a:solidFill>
+                <a:latin typeface="Calibri" pitchFamily="34" charset="0"/>
+                <a:ea typeface="Calibri" pitchFamily="34" charset="-122"/>
+                <a:cs typeface="Calibri" pitchFamily="34" charset="-120"/>
+              </a:rPr>
               <a:t>able to, capable of</a:t>
             </a:r>
             <a:endParaRPr lang="en-US" sz="850" dirty="0"/>
@@ -32526,7 +32765,7 @@
       </p:sp>
       <p:sp>
         <p:nvSpPr>
-          <p:cNvPr id="22" name="Shape 20"/>
+          <p:cNvPr id="25" name="Shape 23"/>
           <p:cNvSpPr/>
           <p:nvPr/>
         </p:nvSpPr>
@@ -32553,7 +32792,7 @@
       </p:sp>
       <p:sp>
         <p:nvSpPr>
-          <p:cNvPr id="23" name="Text 21"/>
+          <p:cNvPr id="26" name="Text 24"/>
           <p:cNvSpPr/>
           <p:nvPr/>
         </p:nvSpPr>
@@ -32592,7 +32831,7 @@
       </p:sp>
       <p:sp>
         <p:nvSpPr>
-          <p:cNvPr id="24" name="Shape 22"/>
+          <p:cNvPr id="27" name="Shape 25"/>
           <p:cNvSpPr/>
           <p:nvPr/>
         </p:nvSpPr>
@@ -32619,7 +32858,7 @@
       </p:sp>
       <p:sp>
         <p:nvSpPr>
-          <p:cNvPr id="25" name="Shape 23"/>
+          <p:cNvPr id="28" name="Shape 26"/>
           <p:cNvSpPr/>
           <p:nvPr/>
         </p:nvSpPr>
@@ -32646,7 +32885,7 @@
       </p:sp>
       <p:sp>
         <p:nvSpPr>
-          <p:cNvPr id="26" name="Text 24"/>
+          <p:cNvPr id="29" name="Text 27"/>
           <p:cNvSpPr/>
           <p:nvPr/>
         </p:nvSpPr>
@@ -32685,7 +32924,7 @@
       </p:sp>
       <p:sp>
         <p:nvSpPr>
-          <p:cNvPr id="27" name="Text 25"/>
+          <p:cNvPr id="30" name="Text 28"/>
           <p:cNvSpPr/>
           <p:nvPr/>
         </p:nvSpPr>
@@ -32724,7 +32963,7 @@
       </p:sp>
       <p:sp>
         <p:nvSpPr>
-          <p:cNvPr id="28" name="Shape 26"/>
+          <p:cNvPr id="31" name="Shape 29"/>
           <p:cNvSpPr/>
           <p:nvPr/>
         </p:nvSpPr>
@@ -32751,7 +32990,7 @@
       </p:sp>
       <p:sp>
         <p:nvSpPr>
-          <p:cNvPr id="29" name="Text 27"/>
+          <p:cNvPr id="32" name="Text 30"/>
           <p:cNvSpPr/>
           <p:nvPr/>
         </p:nvSpPr>
@@ -32790,7 +33029,7 @@
       </p:sp>
       <p:sp>
         <p:nvSpPr>
-          <p:cNvPr id="30" name="Text 28"/>
+          <p:cNvPr id="33" name="Text 31"/>
           <p:cNvSpPr/>
           <p:nvPr/>
         </p:nvSpPr>
@@ -32829,7 +33068,7 @@
       </p:sp>
       <p:sp>
         <p:nvSpPr>
-          <p:cNvPr id="31" name="Shape 29"/>
+          <p:cNvPr id="34" name="Shape 32"/>
           <p:cNvSpPr/>
           <p:nvPr/>
         </p:nvSpPr>
@@ -32856,7 +33095,7 @@
       </p:sp>
       <p:sp>
         <p:nvSpPr>
-          <p:cNvPr id="32" name="Text 30"/>
+          <p:cNvPr id="35" name="Text 33"/>
           <p:cNvSpPr/>
           <p:nvPr/>
         </p:nvSpPr>
@@ -32895,7 +33134,7 @@
       </p:sp>
       <p:sp>
         <p:nvSpPr>
-          <p:cNvPr id="33" name="Shape 31"/>
+          <p:cNvPr id="36" name="Shape 34"/>
           <p:cNvSpPr/>
           <p:nvPr/>
         </p:nvSpPr>
@@ -32922,7 +33161,7 @@
       </p:sp>
       <p:sp>
         <p:nvSpPr>
-          <p:cNvPr id="34" name="Text 32"/>
+          <p:cNvPr id="37" name="Text 35"/>
           <p:cNvSpPr/>
           <p:nvPr/>
         </p:nvSpPr>
@@ -32961,7 +33200,7 @@
       </p:sp>
       <p:sp>
         <p:nvSpPr>
-          <p:cNvPr id="35" name="Shape 33"/>
+          <p:cNvPr id="38" name="Shape 36"/>
           <p:cNvSpPr/>
           <p:nvPr/>
         </p:nvSpPr>
@@ -32988,7 +33227,7 @@
       </p:sp>
       <p:sp>
         <p:nvSpPr>
-          <p:cNvPr id="36" name="Text 34"/>
+          <p:cNvPr id="39" name="Text 37"/>
           <p:cNvSpPr/>
           <p:nvPr/>
         </p:nvSpPr>
@@ -33530,7 +33769,7 @@
         </p:nvSpPr>
         <p:spPr>
           <a:xfrm>
-            <a:off x="2938272" y="2258568"/>
+            <a:off x="2221992" y="2258568"/>
             <a:ext cx="1828800" cy="292608"/>
           </a:xfrm>
           <a:prstGeom prst="rect">
@@ -33564,7 +33803,7 @@
         </p:nvSpPr>
         <p:spPr>
           <a:xfrm>
-            <a:off x="2938272" y="2258568"/>
+            <a:off x="2221992" y="2258568"/>
             <a:ext cx="1828800" cy="292608"/>
           </a:xfrm>
           <a:prstGeom prst="rect">
@@ -33603,7 +33842,7 @@
         </p:nvSpPr>
         <p:spPr>
           <a:xfrm>
-            <a:off x="2938272" y="2569464"/>
+            <a:off x="2221992" y="2569464"/>
             <a:ext cx="1828800" cy="201168"/>
           </a:xfrm>
           <a:prstGeom prst="rect">
@@ -33642,7 +33881,7 @@
         </p:nvSpPr>
         <p:spPr>
           <a:xfrm>
-            <a:off x="5803392" y="2258568"/>
+            <a:off x="4370832" y="2258568"/>
             <a:ext cx="1828800" cy="292608"/>
           </a:xfrm>
           <a:prstGeom prst="rect">
@@ -33676,7 +33915,7 @@
         </p:nvSpPr>
         <p:spPr>
           <a:xfrm>
-            <a:off x="5803392" y="2258568"/>
+            <a:off x="4370832" y="2258568"/>
             <a:ext cx="1828800" cy="292608"/>
           </a:xfrm>
           <a:prstGeom prst="rect">
@@ -33701,7 +33940,7 @@
                 <a:ea typeface="Trebuchet MS" pitchFamily="34" charset="-122"/>
                 <a:cs typeface="Trebuchet MS" pitchFamily="34" charset="-120"/>
               </a:rPr>
-              <a:t>atile</a:t>
+              <a:t>at</a:t>
             </a:r>
             <a:endParaRPr lang="en-US" sz="1300" dirty="0"/>
           </a:p>
@@ -33715,7 +33954,7 @@
         </p:nvSpPr>
         <p:spPr>
           <a:xfrm>
-            <a:off x="5803392" y="2569464"/>
+            <a:off x="4370832" y="2569464"/>
             <a:ext cx="1828800" cy="201168"/>
           </a:xfrm>
           <a:prstGeom prst="rect">
@@ -33740,6 +33979,118 @@
                 <a:ea typeface="Calibri" pitchFamily="34" charset="-122"/>
                 <a:cs typeface="Calibri" pitchFamily="34" charset="-120"/>
               </a:rPr>
+              <a:t>connecting form</a:t>
+            </a:r>
+            <a:endParaRPr lang="en-US" sz="850" dirty="0"/>
+          </a:p>
+        </p:txBody>
+      </p:sp>
+      <p:sp>
+        <p:nvSpPr>
+          <p:cNvPr id="22" name="Shape 20"/>
+          <p:cNvSpPr/>
+          <p:nvPr/>
+        </p:nvSpPr>
+        <p:spPr>
+          <a:xfrm>
+            <a:off x="6519672" y="2258568"/>
+            <a:ext cx="1828800" cy="292608"/>
+          </a:xfrm>
+          <a:prstGeom prst="rect">
+            <a:avLst>
+              <a:gd name="adj" fmla="val 25000"/>
+            </a:avLst>
+          </a:prstGeom>
+          <a:solidFill>
+            <a:srgbClr val="FCE7F3"/>
+          </a:solidFill>
+          <a:ln w="19050">
+            <a:solidFill>
+              <a:srgbClr val="DB2777"/>
+            </a:solidFill>
+            <a:prstDash val="solid"/>
+          </a:ln>
+          <a:effectLst>
+            <a:outerShdw sx="100000" sy="100000" kx="0" ky="0" algn="bl" rotWithShape="0" blurRad="101600" dist="38100" dir="8100000">
+              <a:srgbClr val="000000">
+                <a:alpha val="12000"/>
+              </a:srgbClr>
+            </a:outerShdw>
+          </a:effectLst>
+        </p:spPr>
+      </p:sp>
+      <p:sp>
+        <p:nvSpPr>
+          <p:cNvPr id="23" name="Text 21"/>
+          <p:cNvSpPr/>
+          <p:nvPr/>
+        </p:nvSpPr>
+        <p:spPr>
+          <a:xfrm>
+            <a:off x="6519672" y="2258568"/>
+            <a:ext cx="1828800" cy="292608"/>
+          </a:xfrm>
+          <a:prstGeom prst="rect">
+            <a:avLst/>
+          </a:prstGeom>
+          <a:noFill/>
+          <a:ln/>
+        </p:spPr>
+        <p:txBody>
+          <a:bodyPr wrap="square" lIns="0" tIns="0" rIns="0" bIns="0" rtlCol="0" anchor="ctr"/>
+          <a:lstStyle/>
+          <a:p>
+            <a:pPr algn="ctr" indent="0" marL="0">
+              <a:buNone/>
+            </a:pPr>
+            <a:r>
+              <a:rPr lang="en-US" sz="1300" b="1" dirty="0">
+                <a:solidFill>
+                  <a:srgbClr val="9D174D"/>
+                </a:solidFill>
+                <a:latin typeface="Trebuchet MS" pitchFamily="34" charset="0"/>
+                <a:ea typeface="Trebuchet MS" pitchFamily="34" charset="-122"/>
+                <a:cs typeface="Trebuchet MS" pitchFamily="34" charset="-120"/>
+              </a:rPr>
+              <a:t>ile</a:t>
+            </a:r>
+            <a:endParaRPr lang="en-US" sz="1300" dirty="0"/>
+          </a:p>
+        </p:txBody>
+      </p:sp>
+      <p:sp>
+        <p:nvSpPr>
+          <p:cNvPr id="24" name="Text 22"/>
+          <p:cNvSpPr/>
+          <p:nvPr/>
+        </p:nvSpPr>
+        <p:spPr>
+          <a:xfrm>
+            <a:off x="6519672" y="2569464"/>
+            <a:ext cx="1828800" cy="201168"/>
+          </a:xfrm>
+          <a:prstGeom prst="rect">
+            <a:avLst/>
+          </a:prstGeom>
+          <a:noFill/>
+          <a:ln/>
+        </p:spPr>
+        <p:txBody>
+          <a:bodyPr wrap="square" lIns="0" tIns="0" rIns="0" bIns="0" rtlCol="0" anchor="t"/>
+          <a:lstStyle/>
+          <a:p>
+            <a:pPr algn="ctr" indent="0" marL="0">
+              <a:buNone/>
+            </a:pPr>
+            <a:r>
+              <a:rPr lang="en-US" sz="850" dirty="0">
+                <a:solidFill>
+                  <a:srgbClr val="475569"/>
+                </a:solidFill>
+                <a:latin typeface="Calibri" pitchFamily="34" charset="0"/>
+                <a:ea typeface="Calibri" pitchFamily="34" charset="-122"/>
+                <a:cs typeface="Calibri" pitchFamily="34" charset="-120"/>
+              </a:rPr>
               <a:t>able to, capable of</a:t>
             </a:r>
             <a:endParaRPr lang="en-US" sz="850" dirty="0"/>
@@ -33748,7 +34099,7 @@
       </p:sp>
       <p:sp>
         <p:nvSpPr>
-          <p:cNvPr id="22" name="Shape 20"/>
+          <p:cNvPr id="25" name="Shape 23"/>
           <p:cNvSpPr/>
           <p:nvPr/>
         </p:nvSpPr>
@@ -33775,7 +34126,7 @@
       </p:sp>
       <p:sp>
         <p:nvSpPr>
-          <p:cNvPr id="23" name="Text 21"/>
+          <p:cNvPr id="26" name="Text 24"/>
           <p:cNvSpPr/>
           <p:nvPr/>
         </p:nvSpPr>
@@ -33814,7 +34165,7 @@
       </p:sp>
       <p:sp>
         <p:nvSpPr>
-          <p:cNvPr id="24" name="Shape 22"/>
+          <p:cNvPr id="27" name="Shape 25"/>
           <p:cNvSpPr/>
           <p:nvPr/>
         </p:nvSpPr>
@@ -33841,7 +34192,7 @@
       </p:sp>
       <p:sp>
         <p:nvSpPr>
-          <p:cNvPr id="25" name="Shape 23"/>
+          <p:cNvPr id="28" name="Shape 26"/>
           <p:cNvSpPr/>
           <p:nvPr/>
         </p:nvSpPr>
@@ -33868,7 +34219,7 @@
       </p:sp>
       <p:sp>
         <p:nvSpPr>
-          <p:cNvPr id="26" name="Text 24"/>
+          <p:cNvPr id="29" name="Text 27"/>
           <p:cNvSpPr/>
           <p:nvPr/>
         </p:nvSpPr>
@@ -33907,7 +34258,7 @@
       </p:sp>
       <p:sp>
         <p:nvSpPr>
-          <p:cNvPr id="27" name="Text 25"/>
+          <p:cNvPr id="30" name="Text 28"/>
           <p:cNvSpPr/>
           <p:nvPr/>
         </p:nvSpPr>
@@ -33946,7 +34297,7 @@
       </p:sp>
       <p:sp>
         <p:nvSpPr>
-          <p:cNvPr id="28" name="Shape 26"/>
+          <p:cNvPr id="31" name="Shape 29"/>
           <p:cNvSpPr/>
           <p:nvPr/>
         </p:nvSpPr>
@@ -33973,7 +34324,7 @@
       </p:sp>
       <p:sp>
         <p:nvSpPr>
-          <p:cNvPr id="29" name="Text 27"/>
+          <p:cNvPr id="32" name="Text 30"/>
           <p:cNvSpPr/>
           <p:nvPr/>
         </p:nvSpPr>
@@ -34012,7 +34363,7 @@
       </p:sp>
       <p:sp>
         <p:nvSpPr>
-          <p:cNvPr id="30" name="Text 28"/>
+          <p:cNvPr id="33" name="Text 31"/>
           <p:cNvSpPr/>
           <p:nvPr/>
         </p:nvSpPr>
@@ -34051,7 +34402,7 @@
       </p:sp>
       <p:sp>
         <p:nvSpPr>
-          <p:cNvPr id="31" name="Shape 29"/>
+          <p:cNvPr id="34" name="Shape 32"/>
           <p:cNvSpPr/>
           <p:nvPr/>
         </p:nvSpPr>
@@ -34078,7 +34429,7 @@
       </p:sp>
       <p:sp>
         <p:nvSpPr>
-          <p:cNvPr id="32" name="Text 30"/>
+          <p:cNvPr id="35" name="Text 33"/>
           <p:cNvSpPr/>
           <p:nvPr/>
         </p:nvSpPr>
@@ -34117,7 +34468,7 @@
       </p:sp>
       <p:sp>
         <p:nvSpPr>
-          <p:cNvPr id="33" name="Shape 31"/>
+          <p:cNvPr id="36" name="Shape 34"/>
           <p:cNvSpPr/>
           <p:nvPr/>
         </p:nvSpPr>
@@ -34144,7 +34495,7 @@
       </p:sp>
       <p:sp>
         <p:nvSpPr>
-          <p:cNvPr id="34" name="Text 32"/>
+          <p:cNvPr id="37" name="Text 35"/>
           <p:cNvSpPr/>
           <p:nvPr/>
         </p:nvSpPr>
@@ -34183,7 +34534,7 @@
       </p:sp>
       <p:sp>
         <p:nvSpPr>
-          <p:cNvPr id="35" name="Shape 33"/>
+          <p:cNvPr id="38" name="Shape 36"/>
           <p:cNvSpPr/>
           <p:nvPr/>
         </p:nvSpPr>
@@ -34210,7 +34561,7 @@
       </p:sp>
       <p:sp>
         <p:nvSpPr>
-          <p:cNvPr id="36" name="Shape 34"/>
+          <p:cNvPr id="39" name="Shape 37"/>
           <p:cNvSpPr/>
           <p:nvPr/>
         </p:nvSpPr>
@@ -34237,7 +34588,7 @@
       </p:sp>
       <p:sp>
         <p:nvSpPr>
-          <p:cNvPr id="37" name="Text 35"/>
+          <p:cNvPr id="40" name="Text 38"/>
           <p:cNvSpPr/>
           <p:nvPr/>
         </p:nvSpPr>
@@ -34276,7 +34627,7 @@
       </p:sp>
       <p:sp>
         <p:nvSpPr>
-          <p:cNvPr id="38" name="Shape 36"/>
+          <p:cNvPr id="41" name="Shape 39"/>
           <p:cNvSpPr/>
           <p:nvPr/>
         </p:nvSpPr>
@@ -34303,7 +34654,7 @@
       </p:sp>
       <p:sp>
         <p:nvSpPr>
-          <p:cNvPr id="39" name="Text 37"/>
+          <p:cNvPr id="42" name="Text 40"/>
           <p:cNvSpPr/>
           <p:nvPr/>
         </p:nvSpPr>
@@ -34342,7 +34693,7 @@
       </p:sp>
       <p:sp>
         <p:nvSpPr>
-          <p:cNvPr id="40" name="Shape 38"/>
+          <p:cNvPr id="43" name="Shape 41"/>
           <p:cNvSpPr/>
           <p:nvPr/>
         </p:nvSpPr>
@@ -34369,7 +34720,7 @@
       </p:sp>
       <p:sp>
         <p:nvSpPr>
-          <p:cNvPr id="41" name="Text 39"/>
+          <p:cNvPr id="44" name="Text 42"/>
           <p:cNvSpPr/>
           <p:nvPr/>
         </p:nvSpPr>
@@ -34408,7 +34759,7 @@
       </p:sp>
       <p:sp>
         <p:nvSpPr>
-          <p:cNvPr id="42" name="Shape 40"/>
+          <p:cNvPr id="45" name="Shape 43"/>
           <p:cNvSpPr/>
           <p:nvPr/>
         </p:nvSpPr>
@@ -34435,7 +34786,7 @@
       </p:sp>
       <p:sp>
         <p:nvSpPr>
-          <p:cNvPr id="43" name="Text 41"/>
+          <p:cNvPr id="46" name="Text 44"/>
           <p:cNvSpPr/>
           <p:nvPr/>
         </p:nvSpPr>
@@ -34474,7 +34825,7 @@
       </p:sp>
       <p:sp>
         <p:nvSpPr>
-          <p:cNvPr id="44" name="Shape 42"/>
+          <p:cNvPr id="47" name="Shape 45"/>
           <p:cNvSpPr/>
           <p:nvPr/>
         </p:nvSpPr>
@@ -34501,7 +34852,7 @@
       </p:sp>
       <p:sp>
         <p:nvSpPr>
-          <p:cNvPr id="45" name="Text 43"/>
+          <p:cNvPr id="48" name="Text 46"/>
           <p:cNvSpPr/>
           <p:nvPr/>
         </p:nvSpPr>
@@ -34540,7 +34891,7 @@
       </p:sp>
       <p:sp>
         <p:nvSpPr>
-          <p:cNvPr id="46" name="Shape 44"/>
+          <p:cNvPr id="49" name="Shape 47"/>
           <p:cNvSpPr/>
           <p:nvPr/>
         </p:nvSpPr>
@@ -34567,7 +34918,7 @@
       </p:sp>
       <p:sp>
         <p:nvSpPr>
-          <p:cNvPr id="47" name="Text 45"/>
+          <p:cNvPr id="50" name="Text 48"/>
           <p:cNvSpPr/>
           <p:nvPr/>
         </p:nvSpPr>
@@ -34606,7 +34957,7 @@
       </p:sp>
       <p:sp>
         <p:nvSpPr>
-          <p:cNvPr id="48" name="Text 46"/>
+          <p:cNvPr id="51" name="Text 49"/>
           <p:cNvSpPr/>
           <p:nvPr/>
         </p:nvSpPr>
@@ -36399,7 +36750,7 @@
                 <a:ea typeface="Trebuchet MS" pitchFamily="34" charset="-122"/>
                 <a:cs typeface="Trebuchet MS" pitchFamily="34" charset="-120"/>
               </a:rPr>
-              <a:t>con-</a:t>
+              <a:t>re-</a:t>
             </a:r>
             <a:endParaRPr lang="en-US" sz="1300" dirty="0"/>
           </a:p>
@@ -36680,7 +37031,7 @@
                 <a:ea typeface="Trebuchet MS" pitchFamily="34" charset="-122"/>
                 <a:cs typeface="Trebuchet MS" pitchFamily="34" charset="-120"/>
               </a:rPr>
-              <a:t>-ed</a:t>
+              <a:t>-ity</a:t>
             </a:r>
             <a:endParaRPr lang="en-US" sz="1300" dirty="0"/>
           </a:p>
@@ -36744,7 +37095,7 @@
                 <a:ea typeface="Trebuchet MS" pitchFamily="34" charset="-122"/>
                 <a:cs typeface="Trebuchet MS" pitchFamily="34" charset="-120"/>
               </a:rPr>
-              <a:t>in-</a:t>
+              <a:t>con-</a:t>
             </a:r>
             <a:endParaRPr lang="en-US" sz="1300" dirty="0"/>
           </a:p>
@@ -36833,7 +37184,7 @@
                 <a:ea typeface="Trebuchet MS" pitchFamily="34" charset="-122"/>
                 <a:cs typeface="Trebuchet MS" pitchFamily="34" charset="-120"/>
               </a:rPr>
-              <a:t>-ible</a:t>
+              <a:t>-al</a:t>
             </a:r>
             <a:endParaRPr lang="en-US" sz="1300" dirty="0"/>
           </a:p>
@@ -36897,7 +37248,7 @@
                 <a:ea typeface="Trebuchet MS" pitchFamily="34" charset="-122"/>
                 <a:cs typeface="Trebuchet MS" pitchFamily="34" charset="-120"/>
               </a:rPr>
-              <a:t>re-</a:t>
+              <a:t>in-</a:t>
             </a:r>
             <a:endParaRPr lang="en-US" sz="1300" dirty="0"/>
           </a:p>
@@ -36986,7 +37337,7 @@
                 <a:ea typeface="Trebuchet MS" pitchFamily="34" charset="-122"/>
                 <a:cs typeface="Trebuchet MS" pitchFamily="34" charset="-120"/>
               </a:rPr>
-              <a:t>-ary</a:t>
+              <a:t>-ed</a:t>
             </a:r>
             <a:endParaRPr lang="en-US" sz="1300" dirty="0"/>
           </a:p>
@@ -37139,7 +37490,7 @@
                 <a:ea typeface="Trebuchet MS" pitchFamily="34" charset="-122"/>
                 <a:cs typeface="Trebuchet MS" pitchFamily="34" charset="-120"/>
               </a:rPr>
-              <a:t>-atile</a:t>
+              <a:t>-ible</a:t>
             </a:r>
             <a:endParaRPr lang="en-US" sz="1300" dirty="0"/>
           </a:p>
@@ -37244,7 +37595,7 @@
                 <a:ea typeface="Trebuchet MS" pitchFamily="34" charset="-122"/>
                 <a:cs typeface="Trebuchet MS" pitchFamily="34" charset="-120"/>
               </a:rPr>
-              <a:t>version</a:t>
+              <a:t>reverse</a:t>
             </a:r>
             <a:endParaRPr lang="en-US" sz="1200" dirty="0"/>
           </a:p>
@@ -37310,7 +37661,7 @@
                 <a:ea typeface="Trebuchet MS" pitchFamily="34" charset="-122"/>
                 <a:cs typeface="Trebuchet MS" pitchFamily="34" charset="-120"/>
               </a:rPr>
-              <a:t>reverse</a:t>
+              <a:t>diversion</a:t>
             </a:r>
             <a:endParaRPr lang="en-US" sz="1200" dirty="0"/>
           </a:p>
@@ -37442,7 +37793,7 @@
                 <a:ea typeface="Trebuchet MS" pitchFamily="34" charset="-122"/>
                 <a:cs typeface="Trebuchet MS" pitchFamily="34" charset="-120"/>
               </a:rPr>
-              <a:t>diversion</a:t>
+              <a:t>universe</a:t>
             </a:r>
             <a:endParaRPr lang="en-US" sz="1200" dirty="0"/>
           </a:p>
@@ -37508,7 +37859,7 @@
                 <a:ea typeface="Trebuchet MS" pitchFamily="34" charset="-122"/>
                 <a:cs typeface="Trebuchet MS" pitchFamily="34" charset="-120"/>
               </a:rPr>
-              <a:t>universe</a:t>
+              <a:t>version</a:t>
             </a:r>
             <a:endParaRPr lang="en-US" sz="1200" dirty="0"/>
           </a:p>
@@ -37640,7 +37991,7 @@
                 <a:ea typeface="Trebuchet MS" pitchFamily="34" charset="-122"/>
                 <a:cs typeface="Trebuchet MS" pitchFamily="34" charset="-120"/>
               </a:rPr>
-              <a:t>invertebrate</a:t>
+              <a:t>controversy</a:t>
             </a:r>
             <a:endParaRPr lang="en-US" sz="1200" dirty="0"/>
           </a:p>
@@ -37706,7 +38057,7 @@
                 <a:ea typeface="Trebuchet MS" pitchFamily="34" charset="-122"/>
                 <a:cs typeface="Trebuchet MS" pitchFamily="34" charset="-120"/>
               </a:rPr>
-              <a:t>anniversary</a:t>
+              <a:t>adversity</a:t>
             </a:r>
             <a:endParaRPr lang="en-US" sz="1200" dirty="0"/>
           </a:p>
@@ -38894,7 +39245,7 @@
                 <a:ea typeface="Calibri" pitchFamily="34" charset="-122"/>
                 <a:cs typeface="Calibri" pitchFamily="34" charset="-120"/>
               </a:rPr>
-              <a:t>1.  The root 'vers' comes from a Latin word meaning to turn.</a:t>
+              <a:t>1.  The word 'versatile' contains the root 'vers', meaning it relates to turning or changing.</a:t>
             </a:r>
             <a:endParaRPr lang="en-US" sz="1300" dirty="0"/>
           </a:p>
@@ -39033,7 +39384,7 @@
                 <a:ea typeface="Calibri" pitchFamily="34" charset="-122"/>
                 <a:cs typeface="Calibri" pitchFamily="34" charset="-120"/>
               </a:rPr>
-              <a:t>2.  The word 'reverse' means to move forward quickly.</a:t>
+              <a:t>2.  The word 'universe' has nothing to do with the root 'vers'.</a:t>
             </a:r>
             <a:endParaRPr lang="en-US" sz="1300" dirty="0"/>
           </a:p>
@@ -39172,7 +39523,7 @@
                 <a:ea typeface="Calibri" pitchFamily="34" charset="-122"/>
                 <a:cs typeface="Calibri" pitchFamily="34" charset="-120"/>
               </a:rPr>
-              <a:t>3.  A 'diversion' can be a detour that turns you away from your original path.</a:t>
+              <a:t>3.  The root 'vers' comes from a Latin word meaning to turn or change direction.</a:t>
             </a:r>
             <a:endParaRPr lang="en-US" sz="1300" dirty="0"/>
           </a:p>
@@ -39311,7 +39662,7 @@
                 <a:ea typeface="Calibri" pitchFamily="34" charset="-122"/>
                 <a:cs typeface="Calibri" pitchFamily="34" charset="-120"/>
               </a:rPr>
-              <a:t>4.  The word 'versatile' contains the root 'vers'.</a:t>
+              <a:t>4.  The root 'vers' can also appear as 'vert' in some English words, such as 'invert'.</a:t>
             </a:r>
             <a:endParaRPr lang="en-US" sz="1300" dirty="0"/>
           </a:p>
@@ -39450,7 +39801,7 @@
                 <a:ea typeface="Calibri" pitchFamily="34" charset="-122"/>
                 <a:cs typeface="Calibri" pitchFamily="34" charset="-120"/>
               </a:rPr>
-              <a:t>5.  The root 'vers' comes from a Greek word meaning to speak.</a:t>
+              <a:t>5.  The root 'vers' means to build or construct something.</a:t>
             </a:r>
             <a:endParaRPr lang="en-US" sz="1300" dirty="0"/>
           </a:p>
@@ -40089,7 +40440,7 @@
                 <a:ea typeface="Trebuchet MS" pitchFamily="34" charset="-122"/>
                 <a:cs typeface="Trebuchet MS" pitchFamily="34" charset="-120"/>
               </a:rPr>
-              <a:t>version</a:t>
+              <a:t>reverse</a:t>
             </a:r>
             <a:endParaRPr lang="en-US" sz="1300" dirty="0"/>
           </a:p>
@@ -40155,7 +40506,7 @@
                 <a:ea typeface="Trebuchet MS" pitchFamily="34" charset="-122"/>
                 <a:cs typeface="Trebuchet MS" pitchFamily="34" charset="-120"/>
               </a:rPr>
-              <a:t>reverse</a:t>
+              <a:t>diversion</a:t>
             </a:r>
             <a:endParaRPr lang="en-US" sz="1300" dirty="0"/>
           </a:p>
@@ -40287,7 +40638,7 @@
                 <a:ea typeface="Trebuchet MS" pitchFamily="34" charset="-122"/>
                 <a:cs typeface="Trebuchet MS" pitchFamily="34" charset="-120"/>
               </a:rPr>
-              <a:t>diversion</a:t>
+              <a:t>universe</a:t>
             </a:r>
             <a:endParaRPr lang="en-US" sz="1300" dirty="0"/>
           </a:p>
@@ -40353,7 +40704,7 @@
                 <a:ea typeface="Trebuchet MS" pitchFamily="34" charset="-122"/>
                 <a:cs typeface="Trebuchet MS" pitchFamily="34" charset="-120"/>
               </a:rPr>
-              <a:t>universe</a:t>
+              <a:t>version</a:t>
             </a:r>
             <a:endParaRPr lang="en-US" sz="1300" dirty="0"/>
           </a:p>
@@ -40485,7 +40836,7 @@
                 <a:ea typeface="Trebuchet MS" pitchFamily="34" charset="-122"/>
                 <a:cs typeface="Trebuchet MS" pitchFamily="34" charset="-120"/>
               </a:rPr>
-              <a:t>invertebrate</a:t>
+              <a:t>controversy</a:t>
             </a:r>
             <a:endParaRPr lang="en-US" sz="1300" dirty="0"/>
           </a:p>
@@ -41078,7 +41429,7 @@
                 <a:ea typeface="Trebuchet MS" pitchFamily="34" charset="-122"/>
                 <a:cs typeface="Trebuchet MS" pitchFamily="34" charset="-120"/>
               </a:rPr>
-              <a:t>con-</a:t>
+              <a:t>re-</a:t>
             </a:r>
             <a:endParaRPr lang="en-US" sz="1300" dirty="0"/>
           </a:p>
@@ -41359,7 +41710,7 @@
                 <a:ea typeface="Trebuchet MS" pitchFamily="34" charset="-122"/>
                 <a:cs typeface="Trebuchet MS" pitchFamily="34" charset="-120"/>
               </a:rPr>
-              <a:t>-ed</a:t>
+              <a:t>-ity</a:t>
             </a:r>
             <a:endParaRPr lang="en-US" sz="1300" dirty="0"/>
           </a:p>
@@ -41423,7 +41774,7 @@
                 <a:ea typeface="Trebuchet MS" pitchFamily="34" charset="-122"/>
                 <a:cs typeface="Trebuchet MS" pitchFamily="34" charset="-120"/>
               </a:rPr>
-              <a:t>in-</a:t>
+              <a:t>con-</a:t>
             </a:r>
             <a:endParaRPr lang="en-US" sz="1300" dirty="0"/>
           </a:p>
@@ -41512,7 +41863,7 @@
                 <a:ea typeface="Trebuchet MS" pitchFamily="34" charset="-122"/>
                 <a:cs typeface="Trebuchet MS" pitchFamily="34" charset="-120"/>
               </a:rPr>
-              <a:t>-ible</a:t>
+              <a:t>-al</a:t>
             </a:r>
             <a:endParaRPr lang="en-US" sz="1300" dirty="0"/>
           </a:p>
@@ -41576,7 +41927,7 @@
                 <a:ea typeface="Trebuchet MS" pitchFamily="34" charset="-122"/>
                 <a:cs typeface="Trebuchet MS" pitchFamily="34" charset="-120"/>
               </a:rPr>
-              <a:t>re-</a:t>
+              <a:t>in-</a:t>
             </a:r>
             <a:endParaRPr lang="en-US" sz="1300" dirty="0"/>
           </a:p>
@@ -41665,7 +42016,7 @@
                 <a:ea typeface="Trebuchet MS" pitchFamily="34" charset="-122"/>
                 <a:cs typeface="Trebuchet MS" pitchFamily="34" charset="-120"/>
               </a:rPr>
-              <a:t>-ary</a:t>
+              <a:t>-ed</a:t>
             </a:r>
             <a:endParaRPr lang="en-US" sz="1300" dirty="0"/>
           </a:p>
@@ -41818,7 +42169,7 @@
                 <a:ea typeface="Trebuchet MS" pitchFamily="34" charset="-122"/>
                 <a:cs typeface="Trebuchet MS" pitchFamily="34" charset="-120"/>
               </a:rPr>
-              <a:t>-atile</a:t>
+              <a:t>-ible</a:t>
             </a:r>
             <a:endParaRPr lang="en-US" sz="1300" dirty="0"/>
           </a:p>
@@ -41872,7 +42223,7 @@
         <p:spPr>
           <a:xfrm>
             <a:off x="1508760" y="4178808"/>
-            <a:ext cx="950976" cy="420624"/>
+            <a:ext cx="822960" cy="420624"/>
           </a:xfrm>
           <a:prstGeom prst="rect">
             <a:avLst>
@@ -41906,7 +42257,7 @@
         <p:spPr>
           <a:xfrm>
             <a:off x="1508760" y="4178808"/>
-            <a:ext cx="950976" cy="420624"/>
+            <a:ext cx="822960" cy="420624"/>
           </a:xfrm>
           <a:prstGeom prst="rect">
             <a:avLst/>
@@ -41930,7 +42281,7 @@
                 <a:ea typeface="Trebuchet MS" pitchFamily="34" charset="-122"/>
                 <a:cs typeface="Trebuchet MS" pitchFamily="34" charset="-120"/>
               </a:rPr>
-              <a:t>con-</a:t>
+              <a:t>re-</a:t>
             </a:r>
             <a:endParaRPr lang="en-US" sz="1300" dirty="0"/>
           </a:p>
@@ -41944,7 +42295,7 @@
         </p:nvSpPr>
         <p:spPr>
           <a:xfrm>
-            <a:off x="2487168" y="4178808"/>
+            <a:off x="2359152" y="4178808"/>
             <a:ext cx="320040" cy="420624"/>
           </a:xfrm>
           <a:prstGeom prst="rect">
@@ -41983,7 +42334,7 @@
         </p:nvSpPr>
         <p:spPr>
           <a:xfrm>
-            <a:off x="2834640" y="4178808"/>
+            <a:off x="2706624" y="4178808"/>
             <a:ext cx="1243584" cy="420624"/>
           </a:xfrm>
           <a:prstGeom prst="rect">
@@ -42017,7 +42368,7 @@
         </p:nvSpPr>
         <p:spPr>
           <a:xfrm>
-            <a:off x="2834640" y="4178808"/>
+            <a:off x="2706624" y="4178808"/>
             <a:ext cx="1243584" cy="420624"/>
           </a:xfrm>
           <a:prstGeom prst="rect">
@@ -42056,7 +42407,7 @@
         </p:nvSpPr>
         <p:spPr>
           <a:xfrm>
-            <a:off x="4105656" y="4178808"/>
+            <a:off x="3977640" y="4178808"/>
             <a:ext cx="320040" cy="420624"/>
           </a:xfrm>
           <a:prstGeom prst="rect">
@@ -42095,7 +42446,7 @@
         </p:nvSpPr>
         <p:spPr>
           <a:xfrm>
-            <a:off x="4453128" y="4178808"/>
+            <a:off x="4325112" y="4178808"/>
             <a:ext cx="950976" cy="420624"/>
           </a:xfrm>
           <a:prstGeom prst="rect">
@@ -42129,7 +42480,7 @@
         </p:nvSpPr>
         <p:spPr>
           <a:xfrm>
-            <a:off x="4453128" y="4178808"/>
+            <a:off x="4325112" y="4178808"/>
             <a:ext cx="950976" cy="420624"/>
           </a:xfrm>
           <a:prstGeom prst="rect">
@@ -42168,7 +42519,7 @@
         </p:nvSpPr>
         <p:spPr>
           <a:xfrm>
-            <a:off x="5477256" y="4178808"/>
+            <a:off x="5349240" y="4178808"/>
             <a:ext cx="365760" cy="420624"/>
           </a:xfrm>
           <a:prstGeom prst="rect">
@@ -42207,7 +42558,7 @@
         </p:nvSpPr>
         <p:spPr>
           <a:xfrm>
-            <a:off x="5888736" y="4178808"/>
+            <a:off x="5760720" y="4178808"/>
             <a:ext cx="2194560" cy="420624"/>
           </a:xfrm>
           <a:prstGeom prst="rect">
@@ -42234,7 +42585,7 @@
         </p:nvSpPr>
         <p:spPr>
           <a:xfrm>
-            <a:off x="5888736" y="4178808"/>
+            <a:off x="5760720" y="4178808"/>
             <a:ext cx="2194560" cy="420624"/>
           </a:xfrm>
           <a:prstGeom prst="rect">
@@ -42259,7 +42610,7 @@
                 <a:ea typeface="Trebuchet MS" pitchFamily="34" charset="-122"/>
                 <a:cs typeface="Trebuchet MS" pitchFamily="34" charset="-120"/>
               </a:rPr>
-              <a:t>version</a:t>
+              <a:t>reverse</a:t>
             </a:r>
             <a:endParaRPr lang="en-US" sz="1400" dirty="0"/>
           </a:p>
@@ -42663,7 +43014,7 @@
                 <a:ea typeface="Trebuchet MS" pitchFamily="34" charset="-122"/>
                 <a:cs typeface="Trebuchet MS" pitchFamily="34" charset="-120"/>
               </a:rPr>
-              <a:t>version</a:t>
+              <a:t>reverse</a:t>
             </a:r>
             <a:endParaRPr lang="en-US" sz="1200" dirty="0"/>
           </a:p>
@@ -42729,7 +43080,7 @@
                 <a:ea typeface="Calibri" pitchFamily="34" charset="-122"/>
                 <a:cs typeface="Calibri" pitchFamily="34" charset="-120"/>
               </a:rPr>
-              <a:t>A talk between two or more people, turning words back and forth.</a:t>
+              <a:t>When people talk back and forth with each other, turning ideas between them.</a:t>
             </a:r>
             <a:endParaRPr lang="en-US" sz="1200" dirty="0"/>
           </a:p>
@@ -42802,7 +43153,7 @@
                 <a:ea typeface="Trebuchet MS" pitchFamily="34" charset="-122"/>
                 <a:cs typeface="Trebuchet MS" pitchFamily="34" charset="-120"/>
               </a:rPr>
-              <a:t>reverse</a:t>
+              <a:t>diversion</a:t>
             </a:r>
             <a:endParaRPr lang="en-US" sz="1200" dirty="0"/>
           </a:p>
@@ -42868,7 +43219,7 @@
                 <a:ea typeface="Calibri" pitchFamily="34" charset="-122"/>
                 <a:cs typeface="Calibri" pitchFamily="34" charset="-120"/>
               </a:rPr>
-              <a:t>Everything that exists, all turned into one — all of space and everything in it.</a:t>
+              <a:t>A particular form of something, like a different version of a story.</a:t>
             </a:r>
             <a:endParaRPr lang="en-US" sz="1200" dirty="0"/>
           </a:p>
@@ -43007,7 +43358,7 @@
                 <a:ea typeface="Calibri" pitchFamily="34" charset="-122"/>
                 <a:cs typeface="Calibri" pitchFamily="34" charset="-120"/>
               </a:rPr>
-              <a:t>A particular form of something, like a different telling of the same story.</a:t>
+              <a:t>To go or turn backwards, or the opposite direction.</a:t>
             </a:r>
             <a:endParaRPr lang="en-US" sz="1200" dirty="0"/>
           </a:p>
@@ -43080,7 +43431,7 @@
                 <a:ea typeface="Trebuchet MS" pitchFamily="34" charset="-122"/>
                 <a:cs typeface="Trebuchet MS" pitchFamily="34" charset="-120"/>
               </a:rPr>
-              <a:t>diversion</a:t>
+              <a:t>universe</a:t>
             </a:r>
             <a:endParaRPr lang="en-US" sz="1200" dirty="0"/>
           </a:p>
@@ -43146,7 +43497,7 @@
                 <a:ea typeface="Calibri" pitchFamily="34" charset="-122"/>
                 <a:cs typeface="Calibri" pitchFamily="34" charset="-120"/>
               </a:rPr>
-              <a:t>An animal without a backbone — one that cannot turn or bend on a spine.</a:t>
+              <a:t>A strong disagreement where people turn against each other's opinions.</a:t>
             </a:r>
             <a:endParaRPr lang="en-US" sz="1200" dirty="0"/>
           </a:p>
@@ -43219,7 +43570,7 @@
                 <a:ea typeface="Trebuchet MS" pitchFamily="34" charset="-122"/>
                 <a:cs typeface="Trebuchet MS" pitchFamily="34" charset="-120"/>
               </a:rPr>
-              <a:t>universe</a:t>
+              <a:t>version</a:t>
             </a:r>
             <a:endParaRPr lang="en-US" sz="1200" dirty="0"/>
           </a:p>
@@ -43285,7 +43636,7 @@
                 <a:ea typeface="Calibri" pitchFamily="34" charset="-122"/>
                 <a:cs typeface="Calibri" pitchFamily="34" charset="-120"/>
               </a:rPr>
-              <a:t>Able to turn to many different uses or skills; good at many things.</a:t>
+              <a:t>Able to do many different things or be used in many ways.</a:t>
             </a:r>
             <a:endParaRPr lang="en-US" sz="1200" dirty="0"/>
           </a:p>
@@ -43424,7 +43775,7 @@
                 <a:ea typeface="Calibri" pitchFamily="34" charset="-122"/>
                 <a:cs typeface="Calibri" pitchFamily="34" charset="-120"/>
               </a:rPr>
-              <a:t>Something that turns your attention away, like a detour or distraction.</a:t>
+              <a:t>Everything that exists, all turned or gathered into one.</a:t>
             </a:r>
             <a:endParaRPr lang="en-US" sz="1200" dirty="0"/>
           </a:p>
@@ -43497,7 +43848,7 @@
                 <a:ea typeface="Trebuchet MS" pitchFamily="34" charset="-122"/>
                 <a:cs typeface="Trebuchet MS" pitchFamily="34" charset="-120"/>
               </a:rPr>
-              <a:t>invertebrate</a:t>
+              <a:t>controversy</a:t>
             </a:r>
             <a:endParaRPr lang="en-US" sz="1200" dirty="0"/>
           </a:p>
@@ -43563,7 +43914,7 @@
                 <a:ea typeface="Calibri" pitchFamily="34" charset="-122"/>
                 <a:cs typeface="Calibri" pitchFamily="34" charset="-120"/>
               </a:rPr>
-              <a:t>To turn something around or go backwards.</a:t>
+              <a:t>When something is turned away from its usual path, like traffic being sent a different way.</a:t>
             </a:r>
             <a:endParaRPr lang="en-US" sz="1200" dirty="0"/>
           </a:p>
@@ -44058,7 +44409,7 @@
                 <a:ea typeface="Calibri" pitchFamily="34" charset="-122"/>
                 <a:cs typeface="Calibri" pitchFamily="34" charset="-120"/>
               </a:rPr>
-              <a:t>The road was blocked, so the council set up a diversion to turn traffic down another street.</a:t>
+              <a:t>The road was closed, so drivers had to follow the diversion sign to reach the other side of town.</a:t>
             </a:r>
             <a:endParaRPr lang="en-US" sz="1500" dirty="0"/>
           </a:p>
@@ -44222,7 +44573,7 @@
                 <a:ea typeface="Calibri" pitchFamily="34" charset="-122"/>
                 <a:cs typeface="Calibri" pitchFamily="34" charset="-120"/>
               </a:rPr>
-              <a:t>She was incredibly versatile — she could play guitar, paint, and speak three languages.</a:t>
+              <a:t>She is a very versatile athlete because she can play basketball, swim, and run track all at a high level.</a:t>
             </a:r>
             <a:endParaRPr lang="en-US" sz="1500" dirty="0"/>
           </a:p>
@@ -44386,7 +44737,7 @@
                 <a:ea typeface="Calibri" pitchFamily="34" charset="-122"/>
                 <a:cs typeface="Calibri" pitchFamily="34" charset="-120"/>
               </a:rPr>
-              <a:t>We had a long conversation about which version of the story was the most exciting.</a:t>
+              <a:t>The two friends had a long conversation about their favourite books during lunch.</a:t>
             </a:r>
             <a:endParaRPr lang="en-US" sz="1500" dirty="0"/>
           </a:p>
